--- a/Presentation/RE for the Rest of Us.pptx
+++ b/Presentation/RE for the Rest of Us.pptx
@@ -5,10 +5,10 @@
     <p:sldMasterId id="2147483648" r:id="rId4"/>
   </p:sldMasterIdLst>
   <p:notesMasterIdLst>
-    <p:notesMasterId r:id="rId33"/>
+    <p:notesMasterId r:id="rId37"/>
   </p:notesMasterIdLst>
   <p:handoutMasterIdLst>
-    <p:handoutMasterId r:id="rId34"/>
+    <p:handoutMasterId r:id="rId38"/>
   </p:handoutMasterIdLst>
   <p:sldIdLst>
     <p:sldId id="300" r:id="rId5"/>
@@ -34,11 +34,15 @@
     <p:sldId id="322" r:id="rId25"/>
     <p:sldId id="319" r:id="rId26"/>
     <p:sldId id="323" r:id="rId27"/>
-    <p:sldId id="325" r:id="rId28"/>
-    <p:sldId id="324" r:id="rId29"/>
-    <p:sldId id="318" r:id="rId30"/>
-    <p:sldId id="327" r:id="rId31"/>
-    <p:sldId id="296" r:id="rId32"/>
+    <p:sldId id="328" r:id="rId28"/>
+    <p:sldId id="325" r:id="rId29"/>
+    <p:sldId id="332" r:id="rId30"/>
+    <p:sldId id="333" r:id="rId31"/>
+    <p:sldId id="335" r:id="rId32"/>
+    <p:sldId id="324" r:id="rId33"/>
+    <p:sldId id="318" r:id="rId34"/>
+    <p:sldId id="327" r:id="rId35"/>
+    <p:sldId id="296" r:id="rId36"/>
   </p:sldIdLst>
   <p:sldSz cx="12192000" cy="6858000"/>
   <p:notesSz cx="6858000" cy="9144000"/>
@@ -5763,7 +5767,7 @@
           <a:p>
             <a:fld id="{9D8190EA-5EEC-4300-B6AE-D9734C6C648E}" type="datetimeFigureOut">
               <a:rPr lang="en-US" smtClean="0"/>
-              <a:t>7/17/2025</a:t>
+              <a:t>7/29/2025</a:t>
             </a:fld>
             <a:endParaRPr lang="en-US" dirty="0"/>
           </a:p>
@@ -5940,7 +5944,7 @@
           <a:p>
             <a:fld id="{7487ADD9-2083-264C-A652-8D52D02F7E72}" type="datetimeFigureOut">
               <a:rPr lang="en-US" smtClean="0"/>
-              <a:t>7/17/2025</a:t>
+              <a:t>7/29/2025</a:t>
             </a:fld>
             <a:endParaRPr lang="en-US" dirty="0"/>
           </a:p>
@@ -7500,7 +7504,7 @@
     </p:spTree>
     <p:extLst>
       <p:ext uri="{BB962C8B-B14F-4D97-AF65-F5344CB8AC3E}">
-        <p14:creationId xmlns:p14="http://schemas.microsoft.com/office/powerpoint/2010/main" val="2727223398"/>
+        <p14:creationId xmlns:p14="http://schemas.microsoft.com/office/powerpoint/2010/main" val="4279852247"/>
       </p:ext>
     </p:extLst>
   </p:cSld>
@@ -7554,82 +7558,6 @@
           <a:bodyPr/>
           <a:lstStyle/>
           <a:p>
-            <a:r>
-              <a:rPr lang="en-US" dirty="0"/>
-              <a:t>Learn how </a:t>
-            </a:r>
-            <a:r>
-              <a:rPr lang="en-US" dirty="0" err="1"/>
-              <a:t>Ghidra</a:t>
-            </a:r>
-            <a:r>
-              <a:rPr lang="en-US" dirty="0"/>
-              <a:t> represents basic C logic in assembly and memory.</a:t>
-            </a:r>
-          </a:p>
-          <a:p>
-            <a:endParaRPr lang="en-US" dirty="0"/>
-          </a:p>
-          <a:p>
-            <a:r>
-              <a:rPr lang="en-US" dirty="0"/>
-              <a:t>Load the compiled firmware into </a:t>
-            </a:r>
-            <a:r>
-              <a:rPr lang="en-US" dirty="0" err="1"/>
-              <a:t>Ghidra</a:t>
-            </a:r>
-            <a:r>
-              <a:rPr lang="en-US" dirty="0"/>
-              <a:t>.</a:t>
-            </a:r>
-          </a:p>
-          <a:p>
-            <a:r>
-              <a:rPr lang="en-US" dirty="0"/>
-              <a:t>Find main() and look for key patterns:</a:t>
-            </a:r>
-            <a:br>
-              <a:rPr lang="en-US" dirty="0"/>
-            </a:br>
-            <a:r>
-              <a:rPr lang="en-US" dirty="0"/>
-              <a:t> - Integer operations</a:t>
-            </a:r>
-            <a:br>
-              <a:rPr lang="en-US" dirty="0"/>
-            </a:br>
-            <a:r>
-              <a:rPr lang="en-US" dirty="0"/>
-              <a:t> - LED toggling with </a:t>
-            </a:r>
-            <a:r>
-              <a:rPr lang="en-US" dirty="0" err="1"/>
-              <a:t>digitalWrite</a:t>
-            </a:r>
-            <a:r>
-              <a:rPr lang="en-US" dirty="0"/>
-              <a:t>()</a:t>
-            </a:r>
-            <a:br>
-              <a:rPr lang="en-US" dirty="0"/>
-            </a:br>
-            <a:r>
-              <a:rPr lang="en-US" dirty="0"/>
-              <a:t> - Delays and hex math</a:t>
-            </a:r>
-          </a:p>
-          <a:p>
-            <a:r>
-              <a:rPr lang="en-US" dirty="0" err="1"/>
-              <a:t>Ghidra</a:t>
-            </a:r>
-            <a:r>
-              <a:rPr lang="en-US" dirty="0"/>
-              <a:t> lets us trace how C translates into low-level operations.</a:t>
-            </a:r>
-          </a:p>
-          <a:p>
             <a:endParaRPr lang="en-US" dirty="0"/>
           </a:p>
         </p:txBody>
@@ -7660,7 +7588,7 @@
     </p:spTree>
     <p:extLst>
       <p:ext uri="{BB962C8B-B14F-4D97-AF65-F5344CB8AC3E}">
-        <p14:creationId xmlns:p14="http://schemas.microsoft.com/office/powerpoint/2010/main" val="3713348320"/>
+        <p14:creationId xmlns:p14="http://schemas.microsoft.com/office/powerpoint/2010/main" val="2727223398"/>
       </p:ext>
     </p:extLst>
   </p:cSld>
@@ -7714,58 +7642,6 @@
           <a:bodyPr/>
           <a:lstStyle/>
           <a:p>
-            <a:pPr marL="514350" indent="-514350">
-              <a:buAutoNum type="arabicPeriod"/>
-            </a:pPr>
-            <a:r>
-              <a:rPr lang="en-US" dirty="0"/>
-              <a:t>Learn a few popular tools—</a:t>
-            </a:r>
-            <a:r>
-              <a:rPr lang="en-US" dirty="0" err="1"/>
-              <a:t>Ghidra</a:t>
-            </a:r>
-            <a:r>
-              <a:rPr lang="en-US" dirty="0"/>
-              <a:t>, </a:t>
-            </a:r>
-            <a:r>
-              <a:rPr lang="en-US" dirty="0" err="1"/>
-              <a:t>Binwalk</a:t>
-            </a:r>
-            <a:r>
-              <a:rPr lang="en-US" dirty="0"/>
-              <a:t>, QEMU, and GDB—which help bridge the gap between machine code and human-readable code. Most come preinstalled on Kali Linux and make excellent resume builders.</a:t>
-            </a:r>
-          </a:p>
-          <a:p>
-            <a:pPr marL="514350" indent="-514350">
-              <a:buAutoNum type="arabicPeriod"/>
-            </a:pPr>
-            <a:r>
-              <a:rPr lang="en-US" dirty="0"/>
-              <a:t>You don’t need to be an expert — if you can write simple C, you can start reversing it and doing independent projects.</a:t>
-            </a:r>
-          </a:p>
-          <a:p>
-            <a:pPr marL="514350" indent="-514350">
-              <a:buAutoNum type="arabicPeriod"/>
-            </a:pPr>
-            <a:r>
-              <a:rPr lang="en-US" dirty="0"/>
-              <a:t>Always document your reverse engineering process. Notes, screenshots, and code comments make it easier to replicate, explain, and improve your work.</a:t>
-            </a:r>
-          </a:p>
-          <a:p>
-            <a:pPr marL="514350" indent="-514350">
-              <a:buAutoNum type="arabicPeriod"/>
-            </a:pPr>
-            <a:r>
-              <a:rPr lang="en-US" dirty="0"/>
-              <a:t>Practice makes patterns — the more you reverse, the more familiar code and circuit behaviors will become.</a:t>
-            </a:r>
-          </a:p>
-          <a:p>
             <a:endParaRPr lang="en-US" dirty="0"/>
           </a:p>
         </p:txBody>
@@ -7796,6 +7672,470 @@
     </p:spTree>
     <p:extLst>
       <p:ext uri="{BB962C8B-B14F-4D97-AF65-F5344CB8AC3E}">
+        <p14:creationId xmlns:p14="http://schemas.microsoft.com/office/powerpoint/2010/main" val="565125119"/>
+      </p:ext>
+    </p:extLst>
+  </p:cSld>
+  <p:clrMapOvr>
+    <a:masterClrMapping/>
+  </p:clrMapOvr>
+</p:notes>
+</file>
+
+<file path=ppt/notesSlides/notesSlide23.xml><?xml version="1.0" encoding="utf-8"?>
+<p:notes xmlns:a="http://schemas.openxmlformats.org/drawingml/2006/main" xmlns:r="http://schemas.openxmlformats.org/officeDocument/2006/relationships" xmlns:p="http://schemas.openxmlformats.org/presentationml/2006/main">
+  <p:cSld>
+    <p:spTree>
+      <p:nvGrpSpPr>
+        <p:cNvPr id="1" name=""/>
+        <p:cNvGrpSpPr/>
+        <p:nvPr/>
+      </p:nvGrpSpPr>
+      <p:grpSpPr>
+        <a:xfrm>
+          <a:off x="0" y="0"/>
+          <a:ext cx="0" cy="0"/>
+          <a:chOff x="0" y="0"/>
+          <a:chExt cx="0" cy="0"/>
+        </a:xfrm>
+      </p:grpSpPr>
+      <p:sp>
+        <p:nvSpPr>
+          <p:cNvPr id="2" name="Slide Image Placeholder 1"/>
+          <p:cNvSpPr>
+            <a:spLocks noGrp="1" noRot="1" noChangeAspect="1"/>
+          </p:cNvSpPr>
+          <p:nvPr>
+            <p:ph type="sldImg"/>
+          </p:nvPr>
+        </p:nvSpPr>
+        <p:spPr/>
+      </p:sp>
+      <p:sp>
+        <p:nvSpPr>
+          <p:cNvPr id="3" name="Notes Placeholder 2"/>
+          <p:cNvSpPr>
+            <a:spLocks noGrp="1"/>
+          </p:cNvSpPr>
+          <p:nvPr>
+            <p:ph type="body" idx="1"/>
+          </p:nvPr>
+        </p:nvSpPr>
+        <p:spPr/>
+        <p:txBody>
+          <a:bodyPr/>
+          <a:lstStyle/>
+          <a:p>
+            <a:endParaRPr lang="en-US" dirty="0"/>
+          </a:p>
+        </p:txBody>
+      </p:sp>
+      <p:sp>
+        <p:nvSpPr>
+          <p:cNvPr id="4" name="Slide Number Placeholder 3"/>
+          <p:cNvSpPr>
+            <a:spLocks noGrp="1"/>
+          </p:cNvSpPr>
+          <p:nvPr>
+            <p:ph type="sldNum" sz="quarter" idx="5"/>
+          </p:nvPr>
+        </p:nvSpPr>
+        <p:spPr/>
+        <p:txBody>
+          <a:bodyPr/>
+          <a:lstStyle/>
+          <a:p>
+            <a:fld id="{F97DC217-DF71-1A49-B3EA-559F1F43B0FF}" type="slidenum">
+              <a:rPr lang="en-US" smtClean="0"/>
+              <a:t>27</a:t>
+            </a:fld>
+            <a:endParaRPr lang="en-US" dirty="0"/>
+          </a:p>
+        </p:txBody>
+      </p:sp>
+    </p:spTree>
+    <p:extLst>
+      <p:ext uri="{BB962C8B-B14F-4D97-AF65-F5344CB8AC3E}">
+        <p14:creationId xmlns:p14="http://schemas.microsoft.com/office/powerpoint/2010/main" val="1826214266"/>
+      </p:ext>
+    </p:extLst>
+  </p:cSld>
+  <p:clrMapOvr>
+    <a:masterClrMapping/>
+  </p:clrMapOvr>
+</p:notes>
+</file>
+
+<file path=ppt/notesSlides/notesSlide24.xml><?xml version="1.0" encoding="utf-8"?>
+<p:notes xmlns:a="http://schemas.openxmlformats.org/drawingml/2006/main" xmlns:r="http://schemas.openxmlformats.org/officeDocument/2006/relationships" xmlns:p="http://schemas.openxmlformats.org/presentationml/2006/main">
+  <p:cSld>
+    <p:spTree>
+      <p:nvGrpSpPr>
+        <p:cNvPr id="1" name=""/>
+        <p:cNvGrpSpPr/>
+        <p:nvPr/>
+      </p:nvGrpSpPr>
+      <p:grpSpPr>
+        <a:xfrm>
+          <a:off x="0" y="0"/>
+          <a:ext cx="0" cy="0"/>
+          <a:chOff x="0" y="0"/>
+          <a:chExt cx="0" cy="0"/>
+        </a:xfrm>
+      </p:grpSpPr>
+      <p:sp>
+        <p:nvSpPr>
+          <p:cNvPr id="2" name="Slide Image Placeholder 1"/>
+          <p:cNvSpPr>
+            <a:spLocks noGrp="1" noRot="1" noChangeAspect="1"/>
+          </p:cNvSpPr>
+          <p:nvPr>
+            <p:ph type="sldImg"/>
+          </p:nvPr>
+        </p:nvSpPr>
+        <p:spPr/>
+      </p:sp>
+      <p:sp>
+        <p:nvSpPr>
+          <p:cNvPr id="3" name="Notes Placeholder 2"/>
+          <p:cNvSpPr>
+            <a:spLocks noGrp="1"/>
+          </p:cNvSpPr>
+          <p:nvPr>
+            <p:ph type="body" idx="1"/>
+          </p:nvPr>
+        </p:nvSpPr>
+        <p:spPr/>
+        <p:txBody>
+          <a:bodyPr/>
+          <a:lstStyle/>
+          <a:p>
+            <a:endParaRPr lang="en-US" dirty="0"/>
+          </a:p>
+        </p:txBody>
+      </p:sp>
+      <p:sp>
+        <p:nvSpPr>
+          <p:cNvPr id="4" name="Slide Number Placeholder 3"/>
+          <p:cNvSpPr>
+            <a:spLocks noGrp="1"/>
+          </p:cNvSpPr>
+          <p:nvPr>
+            <p:ph type="sldNum" sz="quarter" idx="5"/>
+          </p:nvPr>
+        </p:nvSpPr>
+        <p:spPr/>
+        <p:txBody>
+          <a:bodyPr/>
+          <a:lstStyle/>
+          <a:p>
+            <a:fld id="{F97DC217-DF71-1A49-B3EA-559F1F43B0FF}" type="slidenum">
+              <a:rPr lang="en-US" smtClean="0"/>
+              <a:t>28</a:t>
+            </a:fld>
+            <a:endParaRPr lang="en-US" dirty="0"/>
+          </a:p>
+        </p:txBody>
+      </p:sp>
+    </p:spTree>
+    <p:extLst>
+      <p:ext uri="{BB962C8B-B14F-4D97-AF65-F5344CB8AC3E}">
+        <p14:creationId xmlns:p14="http://schemas.microsoft.com/office/powerpoint/2010/main" val="3249478180"/>
+      </p:ext>
+    </p:extLst>
+  </p:cSld>
+  <p:clrMapOvr>
+    <a:masterClrMapping/>
+  </p:clrMapOvr>
+</p:notes>
+</file>
+
+<file path=ppt/notesSlides/notesSlide25.xml><?xml version="1.0" encoding="utf-8"?>
+<p:notes xmlns:a="http://schemas.openxmlformats.org/drawingml/2006/main" xmlns:r="http://schemas.openxmlformats.org/officeDocument/2006/relationships" xmlns:p="http://schemas.openxmlformats.org/presentationml/2006/main">
+  <p:cSld>
+    <p:spTree>
+      <p:nvGrpSpPr>
+        <p:cNvPr id="1" name=""/>
+        <p:cNvGrpSpPr/>
+        <p:nvPr/>
+      </p:nvGrpSpPr>
+      <p:grpSpPr>
+        <a:xfrm>
+          <a:off x="0" y="0"/>
+          <a:ext cx="0" cy="0"/>
+          <a:chOff x="0" y="0"/>
+          <a:chExt cx="0" cy="0"/>
+        </a:xfrm>
+      </p:grpSpPr>
+      <p:sp>
+        <p:nvSpPr>
+          <p:cNvPr id="2" name="Slide Image Placeholder 1"/>
+          <p:cNvSpPr>
+            <a:spLocks noGrp="1" noRot="1" noChangeAspect="1"/>
+          </p:cNvSpPr>
+          <p:nvPr>
+            <p:ph type="sldImg"/>
+          </p:nvPr>
+        </p:nvSpPr>
+        <p:spPr/>
+      </p:sp>
+      <p:sp>
+        <p:nvSpPr>
+          <p:cNvPr id="3" name="Notes Placeholder 2"/>
+          <p:cNvSpPr>
+            <a:spLocks noGrp="1"/>
+          </p:cNvSpPr>
+          <p:nvPr>
+            <p:ph type="body" idx="1"/>
+          </p:nvPr>
+        </p:nvSpPr>
+        <p:spPr/>
+        <p:txBody>
+          <a:bodyPr/>
+          <a:lstStyle/>
+          <a:p>
+            <a:r>
+              <a:rPr lang="en-US" dirty="0"/>
+              <a:t>Learn how </a:t>
+            </a:r>
+            <a:r>
+              <a:rPr lang="en-US" dirty="0" err="1"/>
+              <a:t>Ghidra</a:t>
+            </a:r>
+            <a:r>
+              <a:rPr lang="en-US" dirty="0"/>
+              <a:t> represents basic C logic in assembly and memory.</a:t>
+            </a:r>
+          </a:p>
+          <a:p>
+            <a:endParaRPr lang="en-US" dirty="0"/>
+          </a:p>
+          <a:p>
+            <a:r>
+              <a:rPr lang="en-US" dirty="0"/>
+              <a:t>Load the compiled firmware into </a:t>
+            </a:r>
+            <a:r>
+              <a:rPr lang="en-US" dirty="0" err="1"/>
+              <a:t>Ghidra</a:t>
+            </a:r>
+            <a:r>
+              <a:rPr lang="en-US" dirty="0"/>
+              <a:t>.</a:t>
+            </a:r>
+          </a:p>
+          <a:p>
+            <a:r>
+              <a:rPr lang="en-US" dirty="0"/>
+              <a:t>Find main() and look for key patterns:</a:t>
+            </a:r>
+            <a:br>
+              <a:rPr lang="en-US" dirty="0"/>
+            </a:br>
+            <a:r>
+              <a:rPr lang="en-US" dirty="0"/>
+              <a:t> - Integer operations</a:t>
+            </a:r>
+            <a:br>
+              <a:rPr lang="en-US" dirty="0"/>
+            </a:br>
+            <a:r>
+              <a:rPr lang="en-US" dirty="0"/>
+              <a:t> - LED toggling with </a:t>
+            </a:r>
+            <a:r>
+              <a:rPr lang="en-US" dirty="0" err="1"/>
+              <a:t>digitalWrite</a:t>
+            </a:r>
+            <a:r>
+              <a:rPr lang="en-US" dirty="0"/>
+              <a:t>()</a:t>
+            </a:r>
+            <a:br>
+              <a:rPr lang="en-US" dirty="0"/>
+            </a:br>
+            <a:r>
+              <a:rPr lang="en-US" dirty="0"/>
+              <a:t> - Delays and hex math</a:t>
+            </a:r>
+          </a:p>
+          <a:p>
+            <a:r>
+              <a:rPr lang="en-US" dirty="0" err="1"/>
+              <a:t>Ghidra</a:t>
+            </a:r>
+            <a:r>
+              <a:rPr lang="en-US" dirty="0"/>
+              <a:t> lets us trace how C translates into low-level operations.</a:t>
+            </a:r>
+          </a:p>
+          <a:p>
+            <a:endParaRPr lang="en-US" dirty="0"/>
+          </a:p>
+        </p:txBody>
+      </p:sp>
+      <p:sp>
+        <p:nvSpPr>
+          <p:cNvPr id="4" name="Slide Number Placeholder 3"/>
+          <p:cNvSpPr>
+            <a:spLocks noGrp="1"/>
+          </p:cNvSpPr>
+          <p:nvPr>
+            <p:ph type="sldNum" sz="quarter" idx="5"/>
+          </p:nvPr>
+        </p:nvSpPr>
+        <p:spPr/>
+        <p:txBody>
+          <a:bodyPr/>
+          <a:lstStyle/>
+          <a:p>
+            <a:fld id="{F97DC217-DF71-1A49-B3EA-559F1F43B0FF}" type="slidenum">
+              <a:rPr lang="en-US" smtClean="0"/>
+              <a:t>29</a:t>
+            </a:fld>
+            <a:endParaRPr lang="en-US" dirty="0"/>
+          </a:p>
+        </p:txBody>
+      </p:sp>
+    </p:spTree>
+    <p:extLst>
+      <p:ext uri="{BB962C8B-B14F-4D97-AF65-F5344CB8AC3E}">
+        <p14:creationId xmlns:p14="http://schemas.microsoft.com/office/powerpoint/2010/main" val="3713348320"/>
+      </p:ext>
+    </p:extLst>
+  </p:cSld>
+  <p:clrMapOvr>
+    <a:masterClrMapping/>
+  </p:clrMapOvr>
+</p:notes>
+</file>
+
+<file path=ppt/notesSlides/notesSlide26.xml><?xml version="1.0" encoding="utf-8"?>
+<p:notes xmlns:a="http://schemas.openxmlformats.org/drawingml/2006/main" xmlns:r="http://schemas.openxmlformats.org/officeDocument/2006/relationships" xmlns:p="http://schemas.openxmlformats.org/presentationml/2006/main">
+  <p:cSld>
+    <p:spTree>
+      <p:nvGrpSpPr>
+        <p:cNvPr id="1" name=""/>
+        <p:cNvGrpSpPr/>
+        <p:nvPr/>
+      </p:nvGrpSpPr>
+      <p:grpSpPr>
+        <a:xfrm>
+          <a:off x="0" y="0"/>
+          <a:ext cx="0" cy="0"/>
+          <a:chOff x="0" y="0"/>
+          <a:chExt cx="0" cy="0"/>
+        </a:xfrm>
+      </p:grpSpPr>
+      <p:sp>
+        <p:nvSpPr>
+          <p:cNvPr id="2" name="Slide Image Placeholder 1"/>
+          <p:cNvSpPr>
+            <a:spLocks noGrp="1" noRot="1" noChangeAspect="1"/>
+          </p:cNvSpPr>
+          <p:nvPr>
+            <p:ph type="sldImg"/>
+          </p:nvPr>
+        </p:nvSpPr>
+        <p:spPr/>
+      </p:sp>
+      <p:sp>
+        <p:nvSpPr>
+          <p:cNvPr id="3" name="Notes Placeholder 2"/>
+          <p:cNvSpPr>
+            <a:spLocks noGrp="1"/>
+          </p:cNvSpPr>
+          <p:nvPr>
+            <p:ph type="body" idx="1"/>
+          </p:nvPr>
+        </p:nvSpPr>
+        <p:spPr/>
+        <p:txBody>
+          <a:bodyPr/>
+          <a:lstStyle/>
+          <a:p>
+            <a:pPr marL="514350" indent="-514350">
+              <a:buAutoNum type="arabicPeriod"/>
+            </a:pPr>
+            <a:r>
+              <a:rPr lang="en-US" dirty="0"/>
+              <a:t>Learn a few popular tools—</a:t>
+            </a:r>
+            <a:r>
+              <a:rPr lang="en-US" dirty="0" err="1"/>
+              <a:t>Ghidra</a:t>
+            </a:r>
+            <a:r>
+              <a:rPr lang="en-US" dirty="0"/>
+              <a:t>, </a:t>
+            </a:r>
+            <a:r>
+              <a:rPr lang="en-US" dirty="0" err="1"/>
+              <a:t>Binwalk</a:t>
+            </a:r>
+            <a:r>
+              <a:rPr lang="en-US" dirty="0"/>
+              <a:t>, QEMU, and GDB—which help bridge the gap between machine code and human-readable code. Most come preinstalled on Kali Linux and make excellent resume builders.</a:t>
+            </a:r>
+          </a:p>
+          <a:p>
+            <a:pPr marL="514350" indent="-514350">
+              <a:buAutoNum type="arabicPeriod"/>
+            </a:pPr>
+            <a:r>
+              <a:rPr lang="en-US" dirty="0"/>
+              <a:t>You don’t need to be an expert — if you can write simple C, you can start reversing it and doing independent projects.</a:t>
+            </a:r>
+          </a:p>
+          <a:p>
+            <a:pPr marL="514350" indent="-514350">
+              <a:buAutoNum type="arabicPeriod"/>
+            </a:pPr>
+            <a:r>
+              <a:rPr lang="en-US" dirty="0"/>
+              <a:t>Always document your reverse engineering process. Notes, screenshots, and code comments make it easier to replicate, explain, and improve your work.</a:t>
+            </a:r>
+          </a:p>
+          <a:p>
+            <a:pPr marL="514350" indent="-514350">
+              <a:buAutoNum type="arabicPeriod"/>
+            </a:pPr>
+            <a:r>
+              <a:rPr lang="en-US" dirty="0"/>
+              <a:t>Practice makes patterns — the more you reverse, the more familiar code and circuit behaviors will become.</a:t>
+            </a:r>
+          </a:p>
+          <a:p>
+            <a:endParaRPr lang="en-US" dirty="0"/>
+          </a:p>
+        </p:txBody>
+      </p:sp>
+      <p:sp>
+        <p:nvSpPr>
+          <p:cNvPr id="4" name="Slide Number Placeholder 3"/>
+          <p:cNvSpPr>
+            <a:spLocks noGrp="1"/>
+          </p:cNvSpPr>
+          <p:nvPr>
+            <p:ph type="sldNum" sz="quarter" idx="5"/>
+          </p:nvPr>
+        </p:nvSpPr>
+        <p:spPr/>
+        <p:txBody>
+          <a:bodyPr/>
+          <a:lstStyle/>
+          <a:p>
+            <a:fld id="{F97DC217-DF71-1A49-B3EA-559F1F43B0FF}" type="slidenum">
+              <a:rPr lang="en-US" smtClean="0"/>
+              <a:t>30</a:t>
+            </a:fld>
+            <a:endParaRPr lang="en-US" dirty="0"/>
+          </a:p>
+        </p:txBody>
+      </p:sp>
+    </p:spTree>
+    <p:extLst>
+      <p:ext uri="{BB962C8B-B14F-4D97-AF65-F5344CB8AC3E}">
         <p14:creationId xmlns:p14="http://schemas.microsoft.com/office/powerpoint/2010/main" val="1457026247"/>
       </p:ext>
     </p:extLst>
@@ -7806,7 +8146,7 @@
 </p:notes>
 </file>
 
-<file path=ppt/notesSlides/notesSlide23.xml><?xml version="1.0" encoding="utf-8"?>
+<file path=ppt/notesSlides/notesSlide27.xml><?xml version="1.0" encoding="utf-8"?>
 <p:notes xmlns:a="http://schemas.openxmlformats.org/drawingml/2006/main" xmlns:r="http://schemas.openxmlformats.org/officeDocument/2006/relationships" xmlns:p="http://schemas.openxmlformats.org/presentationml/2006/main">
   <p:cSld>
     <p:spTree>
@@ -7895,7 +8235,7 @@
           <a:p>
             <a:fld id="{F97DC217-DF71-1A49-B3EA-559F1F43B0FF}" type="slidenum">
               <a:rPr lang="en-US" smtClean="0"/>
-              <a:t>27</a:t>
+              <a:t>31</a:t>
             </a:fld>
             <a:endParaRPr lang="en-US" dirty="0"/>
           </a:p>
@@ -7914,7 +8254,7 @@
 </p:notes>
 </file>
 
-<file path=ppt/notesSlides/notesSlide24.xml><?xml version="1.0" encoding="utf-8"?>
+<file path=ppt/notesSlides/notesSlide28.xml><?xml version="1.0" encoding="utf-8"?>
 <p:notes xmlns:a="http://schemas.openxmlformats.org/drawingml/2006/main" xmlns:r="http://schemas.openxmlformats.org/officeDocument/2006/relationships" xmlns:p="http://schemas.openxmlformats.org/presentationml/2006/main">
   <p:cSld>
     <p:spTree>
@@ -7997,7 +8337,7 @@
           <a:p>
             <a:fld id="{F97DC217-DF71-1A49-B3EA-559F1F43B0FF}" type="slidenum">
               <a:rPr lang="en-US" smtClean="0"/>
-              <a:t>28</a:t>
+              <a:t>32</a:t>
             </a:fld>
             <a:endParaRPr lang="en-US" dirty="0"/>
           </a:p>
@@ -18988,7 +19328,7 @@
             </a:r>
             <a:r>
               <a:rPr lang="en-US" sz="2200" dirty="0"/>
-              <a:t> </a:t>
+              <a:t>  </a:t>
             </a:r>
           </a:p>
           <a:p>
@@ -19062,6 +19402,72 @@
 </file>
 
 <file path=ppt/slides/slide24.xml><?xml version="1.0" encoding="utf-8"?>
+<p:sld xmlns:a="http://schemas.openxmlformats.org/drawingml/2006/main" xmlns:r="http://schemas.openxmlformats.org/officeDocument/2006/relationships" xmlns:p="http://schemas.openxmlformats.org/presentationml/2006/main">
+  <p:cSld>
+    <p:spTree>
+      <p:nvGrpSpPr>
+        <p:cNvPr id="1" name="">
+          <a:extLst>
+            <a:ext uri="{FF2B5EF4-FFF2-40B4-BE49-F238E27FC236}">
+              <a16:creationId xmlns:a16="http://schemas.microsoft.com/office/drawing/2014/main" id="{E52C989C-B60D-3CFC-E9C9-A7EBCBA6655A}"/>
+            </a:ext>
+          </a:extLst>
+        </p:cNvPr>
+        <p:cNvGrpSpPr/>
+        <p:nvPr/>
+      </p:nvGrpSpPr>
+      <p:grpSpPr>
+        <a:xfrm>
+          <a:off x="0" y="0"/>
+          <a:ext cx="0" cy="0"/>
+          <a:chOff x="0" y="0"/>
+          <a:chExt cx="0" cy="0"/>
+        </a:xfrm>
+      </p:grpSpPr>
+      <p:pic>
+        <p:nvPicPr>
+          <p:cNvPr id="7" name="Picture 6">
+            <a:extLst>
+              <a:ext uri="{FF2B5EF4-FFF2-40B4-BE49-F238E27FC236}">
+                <a16:creationId xmlns:a16="http://schemas.microsoft.com/office/drawing/2014/main" id="{CFF0C0AF-A94C-4257-AE87-93229EB6E1AF}"/>
+              </a:ext>
+            </a:extLst>
+          </p:cNvPr>
+          <p:cNvPicPr>
+            <a:picLocks noChangeAspect="1"/>
+          </p:cNvPicPr>
+          <p:nvPr/>
+        </p:nvPicPr>
+        <p:blipFill>
+          <a:blip r:embed="rId3"/>
+          <a:stretch>
+            <a:fillRect/>
+          </a:stretch>
+        </p:blipFill>
+        <p:spPr>
+          <a:xfrm>
+            <a:off x="432262" y="1186216"/>
+            <a:ext cx="5029200" cy="5060437"/>
+          </a:xfrm>
+          <a:prstGeom prst="rect">
+            <a:avLst/>
+          </a:prstGeom>
+        </p:spPr>
+      </p:pic>
+    </p:spTree>
+    <p:extLst>
+      <p:ext uri="{BB962C8B-B14F-4D97-AF65-F5344CB8AC3E}">
+        <p14:creationId xmlns:p14="http://schemas.microsoft.com/office/powerpoint/2010/main" val="3957018386"/>
+      </p:ext>
+    </p:extLst>
+  </p:cSld>
+  <p:clrMapOvr>
+    <a:masterClrMapping/>
+  </p:clrMapOvr>
+</p:sld>
+</file>
+
+<file path=ppt/slides/slide25.xml><?xml version="1.0" encoding="utf-8"?>
 <p:sld xmlns:a="http://schemas.openxmlformats.org/drawingml/2006/main" xmlns:r="http://schemas.openxmlformats.org/officeDocument/2006/relationships" xmlns:p="http://schemas.openxmlformats.org/presentationml/2006/main">
   <p:cSld>
     <p:spTree>
@@ -19121,7 +19527,1584 @@
 </p:sld>
 </file>
 
-<file path=ppt/slides/slide25.xml><?xml version="1.0" encoding="utf-8"?>
+<file path=ppt/slides/slide26.xml><?xml version="1.0" encoding="utf-8"?>
+<p:sld xmlns:a="http://schemas.openxmlformats.org/drawingml/2006/main" xmlns:r="http://schemas.openxmlformats.org/officeDocument/2006/relationships" xmlns:p="http://schemas.openxmlformats.org/presentationml/2006/main">
+  <p:cSld>
+    <p:spTree>
+      <p:nvGrpSpPr>
+        <p:cNvPr id="1" name=""/>
+        <p:cNvGrpSpPr/>
+        <p:nvPr/>
+      </p:nvGrpSpPr>
+      <p:grpSpPr>
+        <a:xfrm>
+          <a:off x="0" y="0"/>
+          <a:ext cx="0" cy="0"/>
+          <a:chOff x="0" y="0"/>
+          <a:chExt cx="0" cy="0"/>
+        </a:xfrm>
+      </p:grpSpPr>
+      <p:sp>
+        <p:nvSpPr>
+          <p:cNvPr id="14" name="Title 1">
+            <a:extLst>
+              <a:ext uri="{FF2B5EF4-FFF2-40B4-BE49-F238E27FC236}">
+                <a16:creationId xmlns:a16="http://schemas.microsoft.com/office/drawing/2014/main" id="{11D65115-34FC-4F7F-9C8D-D979C2F2135A}"/>
+              </a:ext>
+            </a:extLst>
+          </p:cNvPr>
+          <p:cNvSpPr txBox="1">
+            <a:spLocks/>
+          </p:cNvSpPr>
+          <p:nvPr/>
+        </p:nvSpPr>
+        <p:spPr>
+          <a:xfrm>
+            <a:off x="1158865" y="102021"/>
+            <a:ext cx="6969136" cy="1744415"/>
+          </a:xfrm>
+          <a:prstGeom prst="rect">
+            <a:avLst/>
+          </a:prstGeom>
+        </p:spPr>
+        <p:txBody>
+          <a:bodyPr vert="horz" lIns="91440" tIns="45720" rIns="91440" bIns="45720" rtlCol="0" anchor="b">
+            <a:noAutofit/>
+          </a:bodyPr>
+          <a:lstStyle>
+            <a:lvl1pPr algn="l" defTabSz="914400" rtl="0" eaLnBrk="1" latinLnBrk="0" hangingPunct="1">
+              <a:lnSpc>
+                <a:spcPct val="80000"/>
+              </a:lnSpc>
+              <a:spcBef>
+                <a:spcPct val="0"/>
+              </a:spcBef>
+              <a:buNone/>
+              <a:defRPr sz="6000" b="1" kern="1200">
+                <a:solidFill>
+                  <a:schemeClr val="tx1"/>
+                </a:solidFill>
+                <a:latin typeface="+mj-lt"/>
+                <a:ea typeface="+mj-ea"/>
+                <a:cs typeface="+mj-cs"/>
+              </a:defRPr>
+            </a:lvl1pPr>
+          </a:lstStyle>
+          <a:p>
+            <a:r>
+              <a:rPr lang="en-US" sz="4800" dirty="0" err="1"/>
+              <a:t>Blink_of_an_Eye.ino</a:t>
+            </a:r>
+            <a:endParaRPr lang="en-US" sz="4800" dirty="0"/>
+          </a:p>
+        </p:txBody>
+      </p:sp>
+      <p:sp>
+        <p:nvSpPr>
+          <p:cNvPr id="15" name="Content Placeholder 2">
+            <a:extLst>
+              <a:ext uri="{FF2B5EF4-FFF2-40B4-BE49-F238E27FC236}">
+                <a16:creationId xmlns:a16="http://schemas.microsoft.com/office/drawing/2014/main" id="{95BDAFAF-81D4-4407-BB80-D5FD102548F7}"/>
+              </a:ext>
+            </a:extLst>
+          </p:cNvPr>
+          <p:cNvSpPr txBox="1">
+            <a:spLocks/>
+          </p:cNvSpPr>
+          <p:nvPr/>
+        </p:nvSpPr>
+        <p:spPr>
+          <a:xfrm>
+            <a:off x="1158866" y="2017467"/>
+            <a:ext cx="6756698" cy="4484933"/>
+          </a:xfrm>
+          <a:prstGeom prst="rect">
+            <a:avLst/>
+          </a:prstGeom>
+        </p:spPr>
+        <p:txBody>
+          <a:bodyPr vert="horz" lIns="91440" tIns="45720" rIns="91440" bIns="45720" rtlCol="0" anchor="t" anchorCtr="0">
+            <a:noAutofit/>
+          </a:bodyPr>
+          <a:lstStyle>
+            <a:lvl1pPr marL="0" indent="0" algn="l" defTabSz="914400" rtl="0" eaLnBrk="1" latinLnBrk="0" hangingPunct="1">
+              <a:lnSpc>
+                <a:spcPct val="90000"/>
+              </a:lnSpc>
+              <a:spcBef>
+                <a:spcPts val="1000"/>
+              </a:spcBef>
+              <a:buFont typeface="Arial" panose="020B0604020202020204" pitchFamily="34" charset="0"/>
+              <a:buNone/>
+              <a:defRPr sz="2800" kern="1200">
+                <a:solidFill>
+                  <a:schemeClr val="tx1"/>
+                </a:solidFill>
+                <a:latin typeface="+mn-lt"/>
+                <a:ea typeface="+mn-ea"/>
+                <a:cs typeface="+mn-cs"/>
+              </a:defRPr>
+            </a:lvl1pPr>
+            <a:lvl2pPr marL="457200" indent="0" algn="ctr" defTabSz="914400" rtl="0" eaLnBrk="1" latinLnBrk="0" hangingPunct="1">
+              <a:lnSpc>
+                <a:spcPct val="90000"/>
+              </a:lnSpc>
+              <a:spcBef>
+                <a:spcPts val="500"/>
+              </a:spcBef>
+              <a:buFont typeface="Arial" panose="020B0604020202020204" pitchFamily="34" charset="0"/>
+              <a:buNone/>
+              <a:defRPr sz="2000" kern="1200">
+                <a:solidFill>
+                  <a:schemeClr val="tx1"/>
+                </a:solidFill>
+                <a:latin typeface="+mn-lt"/>
+                <a:ea typeface="+mn-ea"/>
+                <a:cs typeface="+mn-cs"/>
+              </a:defRPr>
+            </a:lvl2pPr>
+            <a:lvl3pPr marL="914400" indent="0" algn="ctr" defTabSz="914400" rtl="0" eaLnBrk="1" latinLnBrk="0" hangingPunct="1">
+              <a:lnSpc>
+                <a:spcPct val="90000"/>
+              </a:lnSpc>
+              <a:spcBef>
+                <a:spcPts val="500"/>
+              </a:spcBef>
+              <a:buFont typeface="Arial" panose="020B0604020202020204" pitchFamily="34" charset="0"/>
+              <a:buNone/>
+              <a:defRPr sz="1800" kern="1200">
+                <a:solidFill>
+                  <a:schemeClr val="tx1"/>
+                </a:solidFill>
+                <a:latin typeface="+mn-lt"/>
+                <a:ea typeface="+mn-ea"/>
+                <a:cs typeface="+mn-cs"/>
+              </a:defRPr>
+            </a:lvl3pPr>
+            <a:lvl4pPr marL="1371600" indent="0" algn="ctr" defTabSz="914400" rtl="0" eaLnBrk="1" latinLnBrk="0" hangingPunct="1">
+              <a:lnSpc>
+                <a:spcPct val="90000"/>
+              </a:lnSpc>
+              <a:spcBef>
+                <a:spcPts val="500"/>
+              </a:spcBef>
+              <a:buFont typeface="Arial" panose="020B0604020202020204" pitchFamily="34" charset="0"/>
+              <a:buNone/>
+              <a:defRPr sz="1600" kern="1200">
+                <a:solidFill>
+                  <a:schemeClr val="tx1"/>
+                </a:solidFill>
+                <a:latin typeface="+mn-lt"/>
+                <a:ea typeface="+mn-ea"/>
+                <a:cs typeface="+mn-cs"/>
+              </a:defRPr>
+            </a:lvl4pPr>
+            <a:lvl5pPr marL="1828800" indent="0" algn="ctr" defTabSz="914400" rtl="0" eaLnBrk="1" latinLnBrk="0" hangingPunct="1">
+              <a:lnSpc>
+                <a:spcPct val="90000"/>
+              </a:lnSpc>
+              <a:spcBef>
+                <a:spcPts val="500"/>
+              </a:spcBef>
+              <a:buFont typeface="Arial" panose="020B0604020202020204" pitchFamily="34" charset="0"/>
+              <a:buNone/>
+              <a:defRPr sz="1600" kern="1200">
+                <a:solidFill>
+                  <a:schemeClr val="tx1"/>
+                </a:solidFill>
+                <a:latin typeface="+mn-lt"/>
+                <a:ea typeface="+mn-ea"/>
+                <a:cs typeface="+mn-cs"/>
+              </a:defRPr>
+            </a:lvl5pPr>
+            <a:lvl6pPr marL="2286000" indent="0" algn="ctr" defTabSz="914400" rtl="0" eaLnBrk="1" latinLnBrk="0" hangingPunct="1">
+              <a:lnSpc>
+                <a:spcPct val="90000"/>
+              </a:lnSpc>
+              <a:spcBef>
+                <a:spcPts val="500"/>
+              </a:spcBef>
+              <a:buFont typeface="Arial" panose="020B0604020202020204" pitchFamily="34" charset="0"/>
+              <a:buNone/>
+              <a:defRPr sz="1600" kern="1200">
+                <a:solidFill>
+                  <a:schemeClr val="tx1"/>
+                </a:solidFill>
+                <a:latin typeface="+mn-lt"/>
+                <a:ea typeface="+mn-ea"/>
+                <a:cs typeface="+mn-cs"/>
+              </a:defRPr>
+            </a:lvl6pPr>
+            <a:lvl7pPr marL="2743200" indent="0" algn="ctr" defTabSz="914400" rtl="0" eaLnBrk="1" latinLnBrk="0" hangingPunct="1">
+              <a:lnSpc>
+                <a:spcPct val="90000"/>
+              </a:lnSpc>
+              <a:spcBef>
+                <a:spcPts val="500"/>
+              </a:spcBef>
+              <a:buFont typeface="Arial" panose="020B0604020202020204" pitchFamily="34" charset="0"/>
+              <a:buNone/>
+              <a:defRPr sz="1600" kern="1200">
+                <a:solidFill>
+                  <a:schemeClr val="tx1"/>
+                </a:solidFill>
+                <a:latin typeface="+mn-lt"/>
+                <a:ea typeface="+mn-ea"/>
+                <a:cs typeface="+mn-cs"/>
+              </a:defRPr>
+            </a:lvl7pPr>
+            <a:lvl8pPr marL="3200400" indent="0" algn="ctr" defTabSz="914400" rtl="0" eaLnBrk="1" latinLnBrk="0" hangingPunct="1">
+              <a:lnSpc>
+                <a:spcPct val="90000"/>
+              </a:lnSpc>
+              <a:spcBef>
+                <a:spcPts val="500"/>
+              </a:spcBef>
+              <a:buFont typeface="Arial" panose="020B0604020202020204" pitchFamily="34" charset="0"/>
+              <a:buNone/>
+              <a:defRPr sz="1600" kern="1200">
+                <a:solidFill>
+                  <a:schemeClr val="tx1"/>
+                </a:solidFill>
+                <a:latin typeface="+mn-lt"/>
+                <a:ea typeface="+mn-ea"/>
+                <a:cs typeface="+mn-cs"/>
+              </a:defRPr>
+            </a:lvl8pPr>
+            <a:lvl9pPr marL="3657600" indent="0" algn="ctr" defTabSz="914400" rtl="0" eaLnBrk="1" latinLnBrk="0" hangingPunct="1">
+              <a:lnSpc>
+                <a:spcPct val="90000"/>
+              </a:lnSpc>
+              <a:spcBef>
+                <a:spcPts val="500"/>
+              </a:spcBef>
+              <a:buFont typeface="Arial" panose="020B0604020202020204" pitchFamily="34" charset="0"/>
+              <a:buNone/>
+              <a:defRPr sz="1600" kern="1200">
+                <a:solidFill>
+                  <a:schemeClr val="tx1"/>
+                </a:solidFill>
+                <a:latin typeface="+mn-lt"/>
+                <a:ea typeface="+mn-ea"/>
+                <a:cs typeface="+mn-cs"/>
+              </a:defRPr>
+            </a:lvl9pPr>
+          </a:lstStyle>
+          <a:p>
+            <a:pPr>
+              <a:lnSpc>
+                <a:spcPct val="120000"/>
+              </a:lnSpc>
+              <a:spcBef>
+                <a:spcPts val="0"/>
+              </a:spcBef>
+            </a:pPr>
+            <a:r>
+              <a:rPr lang="en-US" sz="1400" dirty="0"/>
+              <a:t>⚙️ Setup Function</a:t>
+            </a:r>
+          </a:p>
+          <a:p>
+            <a:pPr>
+              <a:lnSpc>
+                <a:spcPct val="120000"/>
+              </a:lnSpc>
+              <a:spcBef>
+                <a:spcPts val="0"/>
+              </a:spcBef>
+            </a:pPr>
+            <a:r>
+              <a:rPr lang="en-US" sz="1400" dirty="0"/>
+              <a:t>	</a:t>
+            </a:r>
+            <a:r>
+              <a:rPr lang="en-US" sz="1400" dirty="0">
+                <a:latin typeface="Courier New" panose="02070309020205020404" pitchFamily="49" charset="0"/>
+                <a:cs typeface="Courier New" panose="02070309020205020404" pitchFamily="49" charset="0"/>
+              </a:rPr>
+              <a:t>void setup()- </a:t>
+            </a:r>
+            <a:r>
+              <a:rPr lang="en-US" sz="1400" dirty="0"/>
+              <a:t>Called once when the program</a:t>
+            </a:r>
+          </a:p>
+          <a:p>
+            <a:pPr>
+              <a:lnSpc>
+                <a:spcPct val="120000"/>
+              </a:lnSpc>
+              <a:spcBef>
+                <a:spcPts val="0"/>
+              </a:spcBef>
+            </a:pPr>
+            <a:r>
+              <a:rPr lang="en-US" sz="1400" dirty="0"/>
+              <a:t>	</a:t>
+            </a:r>
+            <a:r>
+              <a:rPr lang="en-US" sz="1400" dirty="0" err="1">
+                <a:latin typeface="Courier New" panose="02070309020205020404" pitchFamily="49" charset="0"/>
+                <a:cs typeface="Courier New" panose="02070309020205020404" pitchFamily="49" charset="0"/>
+              </a:rPr>
+              <a:t>pinMode</a:t>
+            </a:r>
+            <a:r>
+              <a:rPr lang="en-US" sz="1400" dirty="0">
+                <a:latin typeface="Courier New" panose="02070309020205020404" pitchFamily="49" charset="0"/>
+                <a:cs typeface="Courier New" panose="02070309020205020404" pitchFamily="49" charset="0"/>
+              </a:rPr>
+              <a:t>(LED_BUILTIN, OUTPUT) - </a:t>
+            </a:r>
+            <a:r>
+              <a:rPr lang="en-US" sz="1400" dirty="0"/>
+              <a:t>Built-in LED as output.</a:t>
+            </a:r>
+          </a:p>
+          <a:p>
+            <a:pPr>
+              <a:lnSpc>
+                <a:spcPct val="120000"/>
+              </a:lnSpc>
+              <a:spcBef>
+                <a:spcPts val="0"/>
+              </a:spcBef>
+            </a:pPr>
+            <a:r>
+              <a:rPr lang="en-US" sz="1400" dirty="0"/>
+              <a:t>🔁 Loop Function</a:t>
+            </a:r>
+          </a:p>
+          <a:p>
+            <a:pPr>
+              <a:lnSpc>
+                <a:spcPct val="120000"/>
+              </a:lnSpc>
+              <a:spcBef>
+                <a:spcPts val="0"/>
+              </a:spcBef>
+            </a:pPr>
+            <a:r>
+              <a:rPr lang="en-US" sz="1400" dirty="0"/>
+              <a:t>	</a:t>
+            </a:r>
+            <a:r>
+              <a:rPr lang="en-US" sz="1400" dirty="0">
+                <a:latin typeface="Courier New" panose="02070309020205020404" pitchFamily="49" charset="0"/>
+                <a:cs typeface="Courier New" panose="02070309020205020404" pitchFamily="49" charset="0"/>
+              </a:rPr>
+              <a:t>unsigned long duration = 30000 </a:t>
+            </a:r>
+            <a:r>
+              <a:rPr lang="en-US" sz="1400" dirty="0"/>
+              <a:t>- Duration set to 30 s.</a:t>
+            </a:r>
+          </a:p>
+          <a:p>
+            <a:pPr>
+              <a:lnSpc>
+                <a:spcPct val="120000"/>
+              </a:lnSpc>
+              <a:spcBef>
+                <a:spcPts val="0"/>
+              </a:spcBef>
+            </a:pPr>
+            <a:r>
+              <a:rPr lang="en-US" sz="1400" dirty="0"/>
+              <a:t>💡 Blinking LED</a:t>
+            </a:r>
+          </a:p>
+          <a:p>
+            <a:pPr>
+              <a:lnSpc>
+                <a:spcPct val="120000"/>
+              </a:lnSpc>
+              <a:spcBef>
+                <a:spcPts val="0"/>
+              </a:spcBef>
+            </a:pPr>
+            <a:r>
+              <a:rPr lang="en-US" sz="1400" dirty="0"/>
+              <a:t>	</a:t>
+            </a:r>
+            <a:r>
+              <a:rPr lang="en-US" sz="1400" dirty="0">
+                <a:latin typeface="Courier New" panose="02070309020205020404" pitchFamily="49" charset="0"/>
+                <a:cs typeface="Courier New" panose="02070309020205020404" pitchFamily="49" charset="0"/>
+              </a:rPr>
+              <a:t>while (</a:t>
+            </a:r>
+            <a:r>
+              <a:rPr lang="en-US" sz="1400" dirty="0" err="1">
+                <a:latin typeface="Courier New" panose="02070309020205020404" pitchFamily="49" charset="0"/>
+                <a:cs typeface="Courier New" panose="02070309020205020404" pitchFamily="49" charset="0"/>
+              </a:rPr>
+              <a:t>millis</a:t>
+            </a:r>
+            <a:r>
+              <a:rPr lang="en-US" sz="1400" dirty="0">
+                <a:latin typeface="Courier New" panose="02070309020205020404" pitchFamily="49" charset="0"/>
+                <a:cs typeface="Courier New" panose="02070309020205020404" pitchFamily="49" charset="0"/>
+              </a:rPr>
+              <a:t>() - </a:t>
+            </a:r>
+            <a:r>
+              <a:rPr lang="en-US" sz="1400" dirty="0" err="1">
+                <a:latin typeface="Courier New" panose="02070309020205020404" pitchFamily="49" charset="0"/>
+                <a:cs typeface="Courier New" panose="02070309020205020404" pitchFamily="49" charset="0"/>
+              </a:rPr>
+              <a:t>startTime</a:t>
+            </a:r>
+            <a:r>
+              <a:rPr lang="en-US" sz="1400" dirty="0">
+                <a:latin typeface="Courier New" panose="02070309020205020404" pitchFamily="49" charset="0"/>
+                <a:cs typeface="Courier New" panose="02070309020205020404" pitchFamily="49" charset="0"/>
+              </a:rPr>
+              <a:t> &lt; duration)</a:t>
+            </a:r>
+            <a:r>
+              <a:rPr lang="en-US" sz="1400" dirty="0"/>
+              <a:t> - Loop for 30 s.</a:t>
+            </a:r>
+          </a:p>
+          <a:p>
+            <a:pPr>
+              <a:lnSpc>
+                <a:spcPct val="120000"/>
+              </a:lnSpc>
+              <a:spcBef>
+                <a:spcPts val="0"/>
+              </a:spcBef>
+            </a:pPr>
+            <a:r>
+              <a:rPr lang="en-US" sz="1400" dirty="0"/>
+              <a:t>	</a:t>
+            </a:r>
+            <a:r>
+              <a:rPr lang="en-US" sz="1400" dirty="0" err="1">
+                <a:latin typeface="Courier New" panose="02070309020205020404" pitchFamily="49" charset="0"/>
+                <a:cs typeface="Courier New" panose="02070309020205020404" pitchFamily="49" charset="0"/>
+              </a:rPr>
+              <a:t>digitalWrite</a:t>
+            </a:r>
+            <a:r>
+              <a:rPr lang="en-US" sz="1400" dirty="0">
+                <a:latin typeface="Courier New" panose="02070309020205020404" pitchFamily="49" charset="0"/>
+                <a:cs typeface="Courier New" panose="02070309020205020404" pitchFamily="49" charset="0"/>
+              </a:rPr>
+              <a:t>(LED_BUILTIN, HIGH)- </a:t>
+            </a:r>
+            <a:r>
+              <a:rPr lang="en-US" sz="1400" dirty="0"/>
+              <a:t>LED on for 200 </a:t>
+            </a:r>
+            <a:r>
+              <a:rPr lang="en-US" sz="1400" dirty="0" err="1"/>
+              <a:t>ms.</a:t>
+            </a:r>
+            <a:endParaRPr lang="en-US" sz="1400" dirty="0"/>
+          </a:p>
+          <a:p>
+            <a:pPr>
+              <a:lnSpc>
+                <a:spcPct val="120000"/>
+              </a:lnSpc>
+              <a:spcBef>
+                <a:spcPts val="0"/>
+              </a:spcBef>
+            </a:pPr>
+            <a:r>
+              <a:rPr lang="en-US" sz="1400" dirty="0"/>
+              <a:t>	</a:t>
+            </a:r>
+            <a:r>
+              <a:rPr lang="en-US" sz="1400" dirty="0" err="1">
+                <a:latin typeface="Courier New" panose="02070309020205020404" pitchFamily="49" charset="0"/>
+                <a:cs typeface="Courier New" panose="02070309020205020404" pitchFamily="49" charset="0"/>
+              </a:rPr>
+              <a:t>digitalWrite</a:t>
+            </a:r>
+            <a:r>
+              <a:rPr lang="en-US" sz="1400" dirty="0">
+                <a:latin typeface="Courier New" panose="02070309020205020404" pitchFamily="49" charset="0"/>
+                <a:cs typeface="Courier New" panose="02070309020205020404" pitchFamily="49" charset="0"/>
+              </a:rPr>
+              <a:t>(LED_BUILTIN, LOW) – </a:t>
+            </a:r>
+            <a:r>
+              <a:rPr lang="en-US" sz="1400" dirty="0"/>
+              <a:t>LED off for 200 </a:t>
+            </a:r>
+            <a:r>
+              <a:rPr lang="en-US" sz="1400" dirty="0" err="1"/>
+              <a:t>ms.</a:t>
+            </a:r>
+            <a:endParaRPr lang="en-US" sz="1400" b="1" dirty="0"/>
+          </a:p>
+        </p:txBody>
+      </p:sp>
+    </p:spTree>
+    <p:extLst>
+      <p:ext uri="{BB962C8B-B14F-4D97-AF65-F5344CB8AC3E}">
+        <p14:creationId xmlns:p14="http://schemas.microsoft.com/office/powerpoint/2010/main" val="1138956326"/>
+      </p:ext>
+    </p:extLst>
+  </p:cSld>
+  <p:clrMapOvr>
+    <a:masterClrMapping/>
+  </p:clrMapOvr>
+</p:sld>
+</file>
+
+<file path=ppt/slides/slide27.xml><?xml version="1.0" encoding="utf-8"?>
+<p:sld xmlns:a="http://schemas.openxmlformats.org/drawingml/2006/main" xmlns:r="http://schemas.openxmlformats.org/officeDocument/2006/relationships" xmlns:p="http://schemas.openxmlformats.org/presentationml/2006/main">
+  <p:cSld>
+    <p:spTree>
+      <p:nvGrpSpPr>
+        <p:cNvPr id="1" name=""/>
+        <p:cNvGrpSpPr/>
+        <p:nvPr/>
+      </p:nvGrpSpPr>
+      <p:grpSpPr>
+        <a:xfrm>
+          <a:off x="0" y="0"/>
+          <a:ext cx="0" cy="0"/>
+          <a:chOff x="0" y="0"/>
+          <a:chExt cx="0" cy="0"/>
+        </a:xfrm>
+      </p:grpSpPr>
+      <p:sp>
+        <p:nvSpPr>
+          <p:cNvPr id="14" name="Title 1">
+            <a:extLst>
+              <a:ext uri="{FF2B5EF4-FFF2-40B4-BE49-F238E27FC236}">
+                <a16:creationId xmlns:a16="http://schemas.microsoft.com/office/drawing/2014/main" id="{11D65115-34FC-4F7F-9C8D-D979C2F2135A}"/>
+              </a:ext>
+            </a:extLst>
+          </p:cNvPr>
+          <p:cNvSpPr txBox="1">
+            <a:spLocks/>
+          </p:cNvSpPr>
+          <p:nvPr/>
+        </p:nvSpPr>
+        <p:spPr>
+          <a:xfrm>
+            <a:off x="1158865" y="102021"/>
+            <a:ext cx="6969136" cy="1744415"/>
+          </a:xfrm>
+          <a:prstGeom prst="rect">
+            <a:avLst/>
+          </a:prstGeom>
+        </p:spPr>
+        <p:txBody>
+          <a:bodyPr vert="horz" lIns="91440" tIns="45720" rIns="91440" bIns="45720" rtlCol="0" anchor="b">
+            <a:noAutofit/>
+          </a:bodyPr>
+          <a:lstStyle>
+            <a:lvl1pPr algn="l" defTabSz="914400" rtl="0" eaLnBrk="1" latinLnBrk="0" hangingPunct="1">
+              <a:lnSpc>
+                <a:spcPct val="80000"/>
+              </a:lnSpc>
+              <a:spcBef>
+                <a:spcPct val="0"/>
+              </a:spcBef>
+              <a:buNone/>
+              <a:defRPr sz="6000" b="1" kern="1200">
+                <a:solidFill>
+                  <a:schemeClr val="tx1"/>
+                </a:solidFill>
+                <a:latin typeface="+mj-lt"/>
+                <a:ea typeface="+mj-ea"/>
+                <a:cs typeface="+mj-cs"/>
+              </a:defRPr>
+            </a:lvl1pPr>
+          </a:lstStyle>
+          <a:p>
+            <a:r>
+              <a:rPr lang="en-US" sz="4800" dirty="0" err="1"/>
+              <a:t>Keep_it_Lit.ino</a:t>
+            </a:r>
+            <a:endParaRPr lang="en-US" sz="4800" dirty="0"/>
+          </a:p>
+        </p:txBody>
+      </p:sp>
+      <p:sp>
+        <p:nvSpPr>
+          <p:cNvPr id="15" name="Content Placeholder 2">
+            <a:extLst>
+              <a:ext uri="{FF2B5EF4-FFF2-40B4-BE49-F238E27FC236}">
+                <a16:creationId xmlns:a16="http://schemas.microsoft.com/office/drawing/2014/main" id="{95BDAFAF-81D4-4407-BB80-D5FD102548F7}"/>
+              </a:ext>
+            </a:extLst>
+          </p:cNvPr>
+          <p:cNvSpPr txBox="1">
+            <a:spLocks/>
+          </p:cNvSpPr>
+          <p:nvPr/>
+        </p:nvSpPr>
+        <p:spPr>
+          <a:xfrm>
+            <a:off x="1158866" y="2017467"/>
+            <a:ext cx="6756698" cy="4484933"/>
+          </a:xfrm>
+          <a:prstGeom prst="rect">
+            <a:avLst/>
+          </a:prstGeom>
+        </p:spPr>
+        <p:txBody>
+          <a:bodyPr vert="horz" lIns="91440" tIns="45720" rIns="91440" bIns="45720" rtlCol="0" anchor="t" anchorCtr="0">
+            <a:noAutofit/>
+          </a:bodyPr>
+          <a:lstStyle>
+            <a:lvl1pPr marL="0" indent="0" algn="l" defTabSz="914400" rtl="0" eaLnBrk="1" latinLnBrk="0" hangingPunct="1">
+              <a:lnSpc>
+                <a:spcPct val="90000"/>
+              </a:lnSpc>
+              <a:spcBef>
+                <a:spcPts val="1000"/>
+              </a:spcBef>
+              <a:buFont typeface="Arial" panose="020B0604020202020204" pitchFamily="34" charset="0"/>
+              <a:buNone/>
+              <a:defRPr sz="2800" kern="1200">
+                <a:solidFill>
+                  <a:schemeClr val="tx1"/>
+                </a:solidFill>
+                <a:latin typeface="+mn-lt"/>
+                <a:ea typeface="+mn-ea"/>
+                <a:cs typeface="+mn-cs"/>
+              </a:defRPr>
+            </a:lvl1pPr>
+            <a:lvl2pPr marL="457200" indent="0" algn="ctr" defTabSz="914400" rtl="0" eaLnBrk="1" latinLnBrk="0" hangingPunct="1">
+              <a:lnSpc>
+                <a:spcPct val="90000"/>
+              </a:lnSpc>
+              <a:spcBef>
+                <a:spcPts val="500"/>
+              </a:spcBef>
+              <a:buFont typeface="Arial" panose="020B0604020202020204" pitchFamily="34" charset="0"/>
+              <a:buNone/>
+              <a:defRPr sz="2000" kern="1200">
+                <a:solidFill>
+                  <a:schemeClr val="tx1"/>
+                </a:solidFill>
+                <a:latin typeface="+mn-lt"/>
+                <a:ea typeface="+mn-ea"/>
+                <a:cs typeface="+mn-cs"/>
+              </a:defRPr>
+            </a:lvl2pPr>
+            <a:lvl3pPr marL="914400" indent="0" algn="ctr" defTabSz="914400" rtl="0" eaLnBrk="1" latinLnBrk="0" hangingPunct="1">
+              <a:lnSpc>
+                <a:spcPct val="90000"/>
+              </a:lnSpc>
+              <a:spcBef>
+                <a:spcPts val="500"/>
+              </a:spcBef>
+              <a:buFont typeface="Arial" panose="020B0604020202020204" pitchFamily="34" charset="0"/>
+              <a:buNone/>
+              <a:defRPr sz="1800" kern="1200">
+                <a:solidFill>
+                  <a:schemeClr val="tx1"/>
+                </a:solidFill>
+                <a:latin typeface="+mn-lt"/>
+                <a:ea typeface="+mn-ea"/>
+                <a:cs typeface="+mn-cs"/>
+              </a:defRPr>
+            </a:lvl3pPr>
+            <a:lvl4pPr marL="1371600" indent="0" algn="ctr" defTabSz="914400" rtl="0" eaLnBrk="1" latinLnBrk="0" hangingPunct="1">
+              <a:lnSpc>
+                <a:spcPct val="90000"/>
+              </a:lnSpc>
+              <a:spcBef>
+                <a:spcPts val="500"/>
+              </a:spcBef>
+              <a:buFont typeface="Arial" panose="020B0604020202020204" pitchFamily="34" charset="0"/>
+              <a:buNone/>
+              <a:defRPr sz="1600" kern="1200">
+                <a:solidFill>
+                  <a:schemeClr val="tx1"/>
+                </a:solidFill>
+                <a:latin typeface="+mn-lt"/>
+                <a:ea typeface="+mn-ea"/>
+                <a:cs typeface="+mn-cs"/>
+              </a:defRPr>
+            </a:lvl4pPr>
+            <a:lvl5pPr marL="1828800" indent="0" algn="ctr" defTabSz="914400" rtl="0" eaLnBrk="1" latinLnBrk="0" hangingPunct="1">
+              <a:lnSpc>
+                <a:spcPct val="90000"/>
+              </a:lnSpc>
+              <a:spcBef>
+                <a:spcPts val="500"/>
+              </a:spcBef>
+              <a:buFont typeface="Arial" panose="020B0604020202020204" pitchFamily="34" charset="0"/>
+              <a:buNone/>
+              <a:defRPr sz="1600" kern="1200">
+                <a:solidFill>
+                  <a:schemeClr val="tx1"/>
+                </a:solidFill>
+                <a:latin typeface="+mn-lt"/>
+                <a:ea typeface="+mn-ea"/>
+                <a:cs typeface="+mn-cs"/>
+              </a:defRPr>
+            </a:lvl5pPr>
+            <a:lvl6pPr marL="2286000" indent="0" algn="ctr" defTabSz="914400" rtl="0" eaLnBrk="1" latinLnBrk="0" hangingPunct="1">
+              <a:lnSpc>
+                <a:spcPct val="90000"/>
+              </a:lnSpc>
+              <a:spcBef>
+                <a:spcPts val="500"/>
+              </a:spcBef>
+              <a:buFont typeface="Arial" panose="020B0604020202020204" pitchFamily="34" charset="0"/>
+              <a:buNone/>
+              <a:defRPr sz="1600" kern="1200">
+                <a:solidFill>
+                  <a:schemeClr val="tx1"/>
+                </a:solidFill>
+                <a:latin typeface="+mn-lt"/>
+                <a:ea typeface="+mn-ea"/>
+                <a:cs typeface="+mn-cs"/>
+              </a:defRPr>
+            </a:lvl6pPr>
+            <a:lvl7pPr marL="2743200" indent="0" algn="ctr" defTabSz="914400" rtl="0" eaLnBrk="1" latinLnBrk="0" hangingPunct="1">
+              <a:lnSpc>
+                <a:spcPct val="90000"/>
+              </a:lnSpc>
+              <a:spcBef>
+                <a:spcPts val="500"/>
+              </a:spcBef>
+              <a:buFont typeface="Arial" panose="020B0604020202020204" pitchFamily="34" charset="0"/>
+              <a:buNone/>
+              <a:defRPr sz="1600" kern="1200">
+                <a:solidFill>
+                  <a:schemeClr val="tx1"/>
+                </a:solidFill>
+                <a:latin typeface="+mn-lt"/>
+                <a:ea typeface="+mn-ea"/>
+                <a:cs typeface="+mn-cs"/>
+              </a:defRPr>
+            </a:lvl7pPr>
+            <a:lvl8pPr marL="3200400" indent="0" algn="ctr" defTabSz="914400" rtl="0" eaLnBrk="1" latinLnBrk="0" hangingPunct="1">
+              <a:lnSpc>
+                <a:spcPct val="90000"/>
+              </a:lnSpc>
+              <a:spcBef>
+                <a:spcPts val="500"/>
+              </a:spcBef>
+              <a:buFont typeface="Arial" panose="020B0604020202020204" pitchFamily="34" charset="0"/>
+              <a:buNone/>
+              <a:defRPr sz="1600" kern="1200">
+                <a:solidFill>
+                  <a:schemeClr val="tx1"/>
+                </a:solidFill>
+                <a:latin typeface="+mn-lt"/>
+                <a:ea typeface="+mn-ea"/>
+                <a:cs typeface="+mn-cs"/>
+              </a:defRPr>
+            </a:lvl8pPr>
+            <a:lvl9pPr marL="3657600" indent="0" algn="ctr" defTabSz="914400" rtl="0" eaLnBrk="1" latinLnBrk="0" hangingPunct="1">
+              <a:lnSpc>
+                <a:spcPct val="90000"/>
+              </a:lnSpc>
+              <a:spcBef>
+                <a:spcPts val="500"/>
+              </a:spcBef>
+              <a:buFont typeface="Arial" panose="020B0604020202020204" pitchFamily="34" charset="0"/>
+              <a:buNone/>
+              <a:defRPr sz="1600" kern="1200">
+                <a:solidFill>
+                  <a:schemeClr val="tx1"/>
+                </a:solidFill>
+                <a:latin typeface="+mn-lt"/>
+                <a:ea typeface="+mn-ea"/>
+                <a:cs typeface="+mn-cs"/>
+              </a:defRPr>
+            </a:lvl9pPr>
+          </a:lstStyle>
+          <a:p>
+            <a:pPr>
+              <a:lnSpc>
+                <a:spcPct val="120000"/>
+              </a:lnSpc>
+              <a:spcBef>
+                <a:spcPts val="0"/>
+              </a:spcBef>
+            </a:pPr>
+            <a:r>
+              <a:rPr lang="en-US" sz="1400" dirty="0"/>
+              <a:t>🧠 </a:t>
+            </a:r>
+            <a:r>
+              <a:rPr lang="en-US" sz="1400" dirty="0" err="1"/>
+              <a:t>Globals</a:t>
+            </a:r>
+            <a:endParaRPr lang="en-US" sz="1400" dirty="0"/>
+          </a:p>
+          <a:p>
+            <a:pPr>
+              <a:lnSpc>
+                <a:spcPct val="120000"/>
+              </a:lnSpc>
+              <a:spcBef>
+                <a:spcPts val="0"/>
+              </a:spcBef>
+            </a:pPr>
+            <a:r>
+              <a:rPr lang="en-US" sz="1400" dirty="0"/>
+              <a:t>	</a:t>
+            </a:r>
+            <a:r>
+              <a:rPr lang="en-US" sz="1400" dirty="0" err="1">
+                <a:latin typeface="Courier New" panose="02070309020205020404" pitchFamily="49" charset="0"/>
+                <a:cs typeface="Courier New" panose="02070309020205020404" pitchFamily="49" charset="0"/>
+              </a:rPr>
+              <a:t>blinkCount</a:t>
+            </a:r>
+            <a:r>
+              <a:rPr lang="en-US" sz="1400" dirty="0">
+                <a:latin typeface="Courier New" panose="02070309020205020404" pitchFamily="49" charset="0"/>
+                <a:cs typeface="Courier New" panose="02070309020205020404" pitchFamily="49" charset="0"/>
+              </a:rPr>
+              <a:t> – </a:t>
+            </a:r>
+            <a:r>
+              <a:rPr lang="en-US" sz="1400" dirty="0"/>
+              <a:t>stores how many times to blink.</a:t>
+            </a:r>
+          </a:p>
+          <a:p>
+            <a:pPr>
+              <a:lnSpc>
+                <a:spcPct val="120000"/>
+              </a:lnSpc>
+              <a:spcBef>
+                <a:spcPts val="0"/>
+              </a:spcBef>
+            </a:pPr>
+            <a:r>
+              <a:rPr lang="en-US" sz="1400" dirty="0"/>
+              <a:t>⚙️ Setup Function</a:t>
+            </a:r>
+          </a:p>
+          <a:p>
+            <a:pPr>
+              <a:lnSpc>
+                <a:spcPct val="120000"/>
+              </a:lnSpc>
+              <a:spcBef>
+                <a:spcPts val="0"/>
+              </a:spcBef>
+            </a:pPr>
+            <a:r>
+              <a:rPr lang="en-US" sz="1400" dirty="0"/>
+              <a:t>	</a:t>
+            </a:r>
+            <a:r>
+              <a:rPr lang="en-US" sz="1400" dirty="0">
+                <a:latin typeface="Courier New" panose="02070309020205020404" pitchFamily="49" charset="0"/>
+                <a:cs typeface="Courier New" panose="02070309020205020404" pitchFamily="49" charset="0"/>
+              </a:rPr>
+              <a:t>void setup()- </a:t>
+            </a:r>
+            <a:r>
+              <a:rPr lang="en-US" sz="1400" dirty="0"/>
+              <a:t>Called once when the program</a:t>
+            </a:r>
+          </a:p>
+          <a:p>
+            <a:pPr>
+              <a:lnSpc>
+                <a:spcPct val="120000"/>
+              </a:lnSpc>
+              <a:spcBef>
+                <a:spcPts val="0"/>
+              </a:spcBef>
+            </a:pPr>
+            <a:r>
+              <a:rPr lang="en-US" sz="1400" dirty="0"/>
+              <a:t>	</a:t>
+            </a:r>
+            <a:r>
+              <a:rPr lang="en-US" sz="1400" dirty="0" err="1">
+                <a:latin typeface="Courier New" panose="02070309020205020404" pitchFamily="49" charset="0"/>
+                <a:cs typeface="Courier New" panose="02070309020205020404" pitchFamily="49" charset="0"/>
+              </a:rPr>
+              <a:t>pinMode</a:t>
+            </a:r>
+            <a:r>
+              <a:rPr lang="en-US" sz="1400" dirty="0">
+                <a:latin typeface="Courier New" panose="02070309020205020404" pitchFamily="49" charset="0"/>
+                <a:cs typeface="Courier New" panose="02070309020205020404" pitchFamily="49" charset="0"/>
+              </a:rPr>
+              <a:t>(LED_BUILTIN, OUTPUT) - </a:t>
+            </a:r>
+            <a:r>
+              <a:rPr lang="en-US" sz="1400" dirty="0"/>
+              <a:t>Sets the built-in LED pin as an 	output.</a:t>
+            </a:r>
+          </a:p>
+          <a:p>
+            <a:pPr>
+              <a:lnSpc>
+                <a:spcPct val="120000"/>
+              </a:lnSpc>
+              <a:spcBef>
+                <a:spcPts val="0"/>
+              </a:spcBef>
+            </a:pPr>
+            <a:r>
+              <a:rPr lang="en-US" sz="1400" dirty="0"/>
+              <a:t>	</a:t>
+            </a:r>
+            <a:r>
+              <a:rPr lang="en-US" sz="1400" dirty="0" err="1"/>
+              <a:t>Serial.begin</a:t>
+            </a:r>
+            <a:r>
+              <a:rPr lang="en-US" sz="1400" dirty="0"/>
+              <a:t>(9600); – starts serial communication.</a:t>
+            </a:r>
+          </a:p>
+          <a:p>
+            <a:pPr>
+              <a:lnSpc>
+                <a:spcPct val="120000"/>
+              </a:lnSpc>
+              <a:spcBef>
+                <a:spcPts val="0"/>
+              </a:spcBef>
+            </a:pPr>
+            <a:r>
+              <a:rPr lang="en-US" sz="1400" dirty="0"/>
+              <a:t>	Prints: “How many times should I blink?”</a:t>
+            </a:r>
+          </a:p>
+          <a:p>
+            <a:pPr>
+              <a:lnSpc>
+                <a:spcPct val="120000"/>
+              </a:lnSpc>
+              <a:spcBef>
+                <a:spcPts val="0"/>
+              </a:spcBef>
+            </a:pPr>
+            <a:r>
+              <a:rPr lang="en-US" sz="1400" dirty="0"/>
+              <a:t>🔁 Loop Function</a:t>
+            </a:r>
+          </a:p>
+          <a:p>
+            <a:pPr>
+              <a:lnSpc>
+                <a:spcPct val="120000"/>
+              </a:lnSpc>
+              <a:spcBef>
+                <a:spcPts val="0"/>
+              </a:spcBef>
+            </a:pPr>
+            <a:r>
+              <a:rPr lang="en-US" sz="1400" dirty="0"/>
+              <a:t>	Get User Input</a:t>
+            </a:r>
+          </a:p>
+          <a:p>
+            <a:pPr>
+              <a:lnSpc>
+                <a:spcPct val="120000"/>
+              </a:lnSpc>
+              <a:spcBef>
+                <a:spcPts val="0"/>
+              </a:spcBef>
+            </a:pPr>
+            <a:r>
+              <a:rPr lang="en-US" sz="1400" dirty="0"/>
+              <a:t>	Reads integer from Serial.</a:t>
+            </a:r>
+          </a:p>
+          <a:p>
+            <a:pPr>
+              <a:lnSpc>
+                <a:spcPct val="120000"/>
+              </a:lnSpc>
+              <a:spcBef>
+                <a:spcPts val="0"/>
+              </a:spcBef>
+            </a:pPr>
+            <a:r>
+              <a:rPr lang="en-US" sz="1400" dirty="0"/>
+              <a:t>	If &gt; 0, sets ready = true then Blink LED set number of times. </a:t>
+            </a:r>
+          </a:p>
+          <a:p>
+            <a:pPr>
+              <a:lnSpc>
+                <a:spcPct val="120000"/>
+              </a:lnSpc>
+              <a:spcBef>
+                <a:spcPts val="0"/>
+              </a:spcBef>
+            </a:pPr>
+            <a:r>
+              <a:rPr lang="en-US" sz="1400" dirty="0"/>
+              <a:t>	Prints: “Blinking X times!” and “Done blinking!”</a:t>
+            </a:r>
+          </a:p>
+          <a:p>
+            <a:pPr>
+              <a:lnSpc>
+                <a:spcPct val="120000"/>
+              </a:lnSpc>
+              <a:spcBef>
+                <a:spcPts val="0"/>
+              </a:spcBef>
+            </a:pPr>
+            <a:r>
+              <a:rPr lang="en-US" sz="1400" dirty="0"/>
+              <a:t>🔄 Reset</a:t>
+            </a:r>
+          </a:p>
+          <a:p>
+            <a:pPr>
+              <a:lnSpc>
+                <a:spcPct val="120000"/>
+              </a:lnSpc>
+              <a:spcBef>
+                <a:spcPts val="0"/>
+              </a:spcBef>
+            </a:pPr>
+            <a:r>
+              <a:rPr lang="en-US" sz="1400" dirty="0"/>
+              <a:t>	Prompts user again</a:t>
+            </a:r>
+          </a:p>
+        </p:txBody>
+      </p:sp>
+    </p:spTree>
+    <p:extLst>
+      <p:ext uri="{BB962C8B-B14F-4D97-AF65-F5344CB8AC3E}">
+        <p14:creationId xmlns:p14="http://schemas.microsoft.com/office/powerpoint/2010/main" val="989178146"/>
+      </p:ext>
+    </p:extLst>
+  </p:cSld>
+  <p:clrMapOvr>
+    <a:masterClrMapping/>
+  </p:clrMapOvr>
+</p:sld>
+</file>
+
+<file path=ppt/slides/slide28.xml><?xml version="1.0" encoding="utf-8"?>
+<p:sld xmlns:a="http://schemas.openxmlformats.org/drawingml/2006/main" xmlns:r="http://schemas.openxmlformats.org/officeDocument/2006/relationships" xmlns:p="http://schemas.openxmlformats.org/presentationml/2006/main">
+  <p:cSld>
+    <p:spTree>
+      <p:nvGrpSpPr>
+        <p:cNvPr id="1" name=""/>
+        <p:cNvGrpSpPr/>
+        <p:nvPr/>
+      </p:nvGrpSpPr>
+      <p:grpSpPr>
+        <a:xfrm>
+          <a:off x="0" y="0"/>
+          <a:ext cx="0" cy="0"/>
+          <a:chOff x="0" y="0"/>
+          <a:chExt cx="0" cy="0"/>
+        </a:xfrm>
+      </p:grpSpPr>
+      <p:sp>
+        <p:nvSpPr>
+          <p:cNvPr id="14" name="Title 1">
+            <a:extLst>
+              <a:ext uri="{FF2B5EF4-FFF2-40B4-BE49-F238E27FC236}">
+                <a16:creationId xmlns:a16="http://schemas.microsoft.com/office/drawing/2014/main" id="{11D65115-34FC-4F7F-9C8D-D979C2F2135A}"/>
+              </a:ext>
+            </a:extLst>
+          </p:cNvPr>
+          <p:cNvSpPr txBox="1">
+            <a:spLocks/>
+          </p:cNvSpPr>
+          <p:nvPr/>
+        </p:nvSpPr>
+        <p:spPr>
+          <a:xfrm>
+            <a:off x="1158865" y="102021"/>
+            <a:ext cx="6969136" cy="1744415"/>
+          </a:xfrm>
+          <a:prstGeom prst="rect">
+            <a:avLst/>
+          </a:prstGeom>
+        </p:spPr>
+        <p:txBody>
+          <a:bodyPr vert="horz" lIns="91440" tIns="45720" rIns="91440" bIns="45720" rtlCol="0" anchor="b">
+            <a:noAutofit/>
+          </a:bodyPr>
+          <a:lstStyle>
+            <a:lvl1pPr algn="l" defTabSz="914400" rtl="0" eaLnBrk="1" latinLnBrk="0" hangingPunct="1">
+              <a:lnSpc>
+                <a:spcPct val="80000"/>
+              </a:lnSpc>
+              <a:spcBef>
+                <a:spcPct val="0"/>
+              </a:spcBef>
+              <a:buNone/>
+              <a:defRPr sz="6000" b="1" kern="1200">
+                <a:solidFill>
+                  <a:schemeClr val="tx1"/>
+                </a:solidFill>
+                <a:latin typeface="+mj-lt"/>
+                <a:ea typeface="+mj-ea"/>
+                <a:cs typeface="+mj-cs"/>
+              </a:defRPr>
+            </a:lvl1pPr>
+          </a:lstStyle>
+          <a:p>
+            <a:r>
+              <a:rPr lang="en-US" sz="4800" dirty="0" err="1"/>
+              <a:t>Give_me_the_Addy.ino</a:t>
+            </a:r>
+            <a:endParaRPr lang="en-US" sz="4800" dirty="0"/>
+          </a:p>
+        </p:txBody>
+      </p:sp>
+      <p:sp>
+        <p:nvSpPr>
+          <p:cNvPr id="15" name="Content Placeholder 2">
+            <a:extLst>
+              <a:ext uri="{FF2B5EF4-FFF2-40B4-BE49-F238E27FC236}">
+                <a16:creationId xmlns:a16="http://schemas.microsoft.com/office/drawing/2014/main" id="{95BDAFAF-81D4-4407-BB80-D5FD102548F7}"/>
+              </a:ext>
+            </a:extLst>
+          </p:cNvPr>
+          <p:cNvSpPr txBox="1">
+            <a:spLocks/>
+          </p:cNvSpPr>
+          <p:nvPr/>
+        </p:nvSpPr>
+        <p:spPr>
+          <a:xfrm>
+            <a:off x="1158866" y="2017467"/>
+            <a:ext cx="6756698" cy="4484933"/>
+          </a:xfrm>
+          <a:prstGeom prst="rect">
+            <a:avLst/>
+          </a:prstGeom>
+        </p:spPr>
+        <p:txBody>
+          <a:bodyPr vert="horz" lIns="91440" tIns="45720" rIns="91440" bIns="45720" rtlCol="0" anchor="t" anchorCtr="0">
+            <a:noAutofit/>
+          </a:bodyPr>
+          <a:lstStyle>
+            <a:lvl1pPr marL="0" indent="0" algn="l" defTabSz="914400" rtl="0" eaLnBrk="1" latinLnBrk="0" hangingPunct="1">
+              <a:lnSpc>
+                <a:spcPct val="90000"/>
+              </a:lnSpc>
+              <a:spcBef>
+                <a:spcPts val="1000"/>
+              </a:spcBef>
+              <a:buFont typeface="Arial" panose="020B0604020202020204" pitchFamily="34" charset="0"/>
+              <a:buNone/>
+              <a:defRPr sz="2800" kern="1200">
+                <a:solidFill>
+                  <a:schemeClr val="tx1"/>
+                </a:solidFill>
+                <a:latin typeface="+mn-lt"/>
+                <a:ea typeface="+mn-ea"/>
+                <a:cs typeface="+mn-cs"/>
+              </a:defRPr>
+            </a:lvl1pPr>
+            <a:lvl2pPr marL="457200" indent="0" algn="ctr" defTabSz="914400" rtl="0" eaLnBrk="1" latinLnBrk="0" hangingPunct="1">
+              <a:lnSpc>
+                <a:spcPct val="90000"/>
+              </a:lnSpc>
+              <a:spcBef>
+                <a:spcPts val="500"/>
+              </a:spcBef>
+              <a:buFont typeface="Arial" panose="020B0604020202020204" pitchFamily="34" charset="0"/>
+              <a:buNone/>
+              <a:defRPr sz="2000" kern="1200">
+                <a:solidFill>
+                  <a:schemeClr val="tx1"/>
+                </a:solidFill>
+                <a:latin typeface="+mn-lt"/>
+                <a:ea typeface="+mn-ea"/>
+                <a:cs typeface="+mn-cs"/>
+              </a:defRPr>
+            </a:lvl2pPr>
+            <a:lvl3pPr marL="914400" indent="0" algn="ctr" defTabSz="914400" rtl="0" eaLnBrk="1" latinLnBrk="0" hangingPunct="1">
+              <a:lnSpc>
+                <a:spcPct val="90000"/>
+              </a:lnSpc>
+              <a:spcBef>
+                <a:spcPts val="500"/>
+              </a:spcBef>
+              <a:buFont typeface="Arial" panose="020B0604020202020204" pitchFamily="34" charset="0"/>
+              <a:buNone/>
+              <a:defRPr sz="1800" kern="1200">
+                <a:solidFill>
+                  <a:schemeClr val="tx1"/>
+                </a:solidFill>
+                <a:latin typeface="+mn-lt"/>
+                <a:ea typeface="+mn-ea"/>
+                <a:cs typeface="+mn-cs"/>
+              </a:defRPr>
+            </a:lvl3pPr>
+            <a:lvl4pPr marL="1371600" indent="0" algn="ctr" defTabSz="914400" rtl="0" eaLnBrk="1" latinLnBrk="0" hangingPunct="1">
+              <a:lnSpc>
+                <a:spcPct val="90000"/>
+              </a:lnSpc>
+              <a:spcBef>
+                <a:spcPts val="500"/>
+              </a:spcBef>
+              <a:buFont typeface="Arial" panose="020B0604020202020204" pitchFamily="34" charset="0"/>
+              <a:buNone/>
+              <a:defRPr sz="1600" kern="1200">
+                <a:solidFill>
+                  <a:schemeClr val="tx1"/>
+                </a:solidFill>
+                <a:latin typeface="+mn-lt"/>
+                <a:ea typeface="+mn-ea"/>
+                <a:cs typeface="+mn-cs"/>
+              </a:defRPr>
+            </a:lvl4pPr>
+            <a:lvl5pPr marL="1828800" indent="0" algn="ctr" defTabSz="914400" rtl="0" eaLnBrk="1" latinLnBrk="0" hangingPunct="1">
+              <a:lnSpc>
+                <a:spcPct val="90000"/>
+              </a:lnSpc>
+              <a:spcBef>
+                <a:spcPts val="500"/>
+              </a:spcBef>
+              <a:buFont typeface="Arial" panose="020B0604020202020204" pitchFamily="34" charset="0"/>
+              <a:buNone/>
+              <a:defRPr sz="1600" kern="1200">
+                <a:solidFill>
+                  <a:schemeClr val="tx1"/>
+                </a:solidFill>
+                <a:latin typeface="+mn-lt"/>
+                <a:ea typeface="+mn-ea"/>
+                <a:cs typeface="+mn-cs"/>
+              </a:defRPr>
+            </a:lvl5pPr>
+            <a:lvl6pPr marL="2286000" indent="0" algn="ctr" defTabSz="914400" rtl="0" eaLnBrk="1" latinLnBrk="0" hangingPunct="1">
+              <a:lnSpc>
+                <a:spcPct val="90000"/>
+              </a:lnSpc>
+              <a:spcBef>
+                <a:spcPts val="500"/>
+              </a:spcBef>
+              <a:buFont typeface="Arial" panose="020B0604020202020204" pitchFamily="34" charset="0"/>
+              <a:buNone/>
+              <a:defRPr sz="1600" kern="1200">
+                <a:solidFill>
+                  <a:schemeClr val="tx1"/>
+                </a:solidFill>
+                <a:latin typeface="+mn-lt"/>
+                <a:ea typeface="+mn-ea"/>
+                <a:cs typeface="+mn-cs"/>
+              </a:defRPr>
+            </a:lvl6pPr>
+            <a:lvl7pPr marL="2743200" indent="0" algn="ctr" defTabSz="914400" rtl="0" eaLnBrk="1" latinLnBrk="0" hangingPunct="1">
+              <a:lnSpc>
+                <a:spcPct val="90000"/>
+              </a:lnSpc>
+              <a:spcBef>
+                <a:spcPts val="500"/>
+              </a:spcBef>
+              <a:buFont typeface="Arial" panose="020B0604020202020204" pitchFamily="34" charset="0"/>
+              <a:buNone/>
+              <a:defRPr sz="1600" kern="1200">
+                <a:solidFill>
+                  <a:schemeClr val="tx1"/>
+                </a:solidFill>
+                <a:latin typeface="+mn-lt"/>
+                <a:ea typeface="+mn-ea"/>
+                <a:cs typeface="+mn-cs"/>
+              </a:defRPr>
+            </a:lvl7pPr>
+            <a:lvl8pPr marL="3200400" indent="0" algn="ctr" defTabSz="914400" rtl="0" eaLnBrk="1" latinLnBrk="0" hangingPunct="1">
+              <a:lnSpc>
+                <a:spcPct val="90000"/>
+              </a:lnSpc>
+              <a:spcBef>
+                <a:spcPts val="500"/>
+              </a:spcBef>
+              <a:buFont typeface="Arial" panose="020B0604020202020204" pitchFamily="34" charset="0"/>
+              <a:buNone/>
+              <a:defRPr sz="1600" kern="1200">
+                <a:solidFill>
+                  <a:schemeClr val="tx1"/>
+                </a:solidFill>
+                <a:latin typeface="+mn-lt"/>
+                <a:ea typeface="+mn-ea"/>
+                <a:cs typeface="+mn-cs"/>
+              </a:defRPr>
+            </a:lvl8pPr>
+            <a:lvl9pPr marL="3657600" indent="0" algn="ctr" defTabSz="914400" rtl="0" eaLnBrk="1" latinLnBrk="0" hangingPunct="1">
+              <a:lnSpc>
+                <a:spcPct val="90000"/>
+              </a:lnSpc>
+              <a:spcBef>
+                <a:spcPts val="500"/>
+              </a:spcBef>
+              <a:buFont typeface="Arial" panose="020B0604020202020204" pitchFamily="34" charset="0"/>
+              <a:buNone/>
+              <a:defRPr sz="1600" kern="1200">
+                <a:solidFill>
+                  <a:schemeClr val="tx1"/>
+                </a:solidFill>
+                <a:latin typeface="+mn-lt"/>
+                <a:ea typeface="+mn-ea"/>
+                <a:cs typeface="+mn-cs"/>
+              </a:defRPr>
+            </a:lvl9pPr>
+          </a:lstStyle>
+          <a:p>
+            <a:pPr>
+              <a:lnSpc>
+                <a:spcPct val="120000"/>
+              </a:lnSpc>
+              <a:spcBef>
+                <a:spcPts val="0"/>
+              </a:spcBef>
+            </a:pPr>
+            <a:r>
+              <a:rPr lang="en-US" sz="1400" dirty="0"/>
+              <a:t>📁 Includes</a:t>
+            </a:r>
+          </a:p>
+          <a:p>
+            <a:pPr>
+              <a:lnSpc>
+                <a:spcPct val="120000"/>
+              </a:lnSpc>
+              <a:spcBef>
+                <a:spcPts val="0"/>
+              </a:spcBef>
+            </a:pPr>
+            <a:r>
+              <a:rPr lang="en-US" sz="1400" dirty="0"/>
+              <a:t>	</a:t>
+            </a:r>
+            <a:r>
+              <a:rPr lang="en-US" sz="1400" dirty="0" err="1">
+                <a:latin typeface="Courier New" panose="02070309020205020404" pitchFamily="49" charset="0"/>
+                <a:cs typeface="Courier New" panose="02070309020205020404" pitchFamily="49" charset="0"/>
+              </a:rPr>
+              <a:t>arduino_secrets.h</a:t>
+            </a:r>
+            <a:r>
+              <a:rPr lang="en-US" sz="1400" dirty="0">
+                <a:latin typeface="Courier New" panose="02070309020205020404" pitchFamily="49" charset="0"/>
+                <a:cs typeface="Courier New" panose="02070309020205020404" pitchFamily="49" charset="0"/>
+              </a:rPr>
+              <a:t> - </a:t>
+            </a:r>
+            <a:r>
+              <a:rPr lang="en-US" sz="1400" dirty="0"/>
+              <a:t>holds a credentials variable</a:t>
+            </a:r>
+          </a:p>
+          <a:p>
+            <a:pPr>
+              <a:lnSpc>
+                <a:spcPct val="120000"/>
+              </a:lnSpc>
+              <a:spcBef>
+                <a:spcPts val="0"/>
+              </a:spcBef>
+            </a:pPr>
+            <a:r>
+              <a:rPr lang="en-US" sz="1400" dirty="0"/>
+              <a:t>⚙️ Setup Function</a:t>
+            </a:r>
+          </a:p>
+          <a:p>
+            <a:pPr>
+              <a:lnSpc>
+                <a:spcPct val="120000"/>
+              </a:lnSpc>
+              <a:spcBef>
+                <a:spcPts val="0"/>
+              </a:spcBef>
+            </a:pPr>
+            <a:r>
+              <a:rPr lang="en-US" sz="1400" dirty="0"/>
+              <a:t>	</a:t>
+            </a:r>
+            <a:r>
+              <a:rPr lang="en-US" sz="1400" dirty="0" err="1">
+                <a:latin typeface="Courier New" panose="02070309020205020404" pitchFamily="49" charset="0"/>
+                <a:cs typeface="Courier New" panose="02070309020205020404" pitchFamily="49" charset="0"/>
+              </a:rPr>
+              <a:t>Serial.begin</a:t>
+            </a:r>
+            <a:r>
+              <a:rPr lang="en-US" sz="1400" dirty="0">
+                <a:latin typeface="Courier New" panose="02070309020205020404" pitchFamily="49" charset="0"/>
+                <a:cs typeface="Courier New" panose="02070309020205020404" pitchFamily="49" charset="0"/>
+              </a:rPr>
+              <a:t>(9600)–</a:t>
+            </a:r>
+            <a:r>
+              <a:rPr lang="en-US" sz="1400" dirty="0"/>
+              <a:t> starts serial communication at 9600 	baud.</a:t>
+            </a:r>
+          </a:p>
+          <a:p>
+            <a:pPr>
+              <a:lnSpc>
+                <a:spcPct val="120000"/>
+              </a:lnSpc>
+              <a:spcBef>
+                <a:spcPts val="0"/>
+              </a:spcBef>
+            </a:pPr>
+            <a:r>
+              <a:rPr lang="en-US" sz="1400" dirty="0"/>
+              <a:t>🔁 Loop Function</a:t>
+            </a:r>
+          </a:p>
+          <a:p>
+            <a:pPr>
+              <a:lnSpc>
+                <a:spcPct val="120000"/>
+              </a:lnSpc>
+              <a:spcBef>
+                <a:spcPts val="0"/>
+              </a:spcBef>
+            </a:pPr>
+            <a:r>
+              <a:rPr lang="en-US" sz="1400" dirty="0"/>
+              <a:t>	➕ Integer Addition</a:t>
+            </a:r>
+          </a:p>
+          <a:p>
+            <a:pPr>
+              <a:lnSpc>
+                <a:spcPct val="120000"/>
+              </a:lnSpc>
+              <a:spcBef>
+                <a:spcPts val="0"/>
+              </a:spcBef>
+            </a:pPr>
+            <a:r>
+              <a:rPr lang="en-US" sz="1400" dirty="0"/>
+              <a:t>	Adds 5 + 12, prints: a + b = 17.</a:t>
+            </a:r>
+          </a:p>
+          <a:p>
+            <a:pPr>
+              <a:lnSpc>
+                <a:spcPct val="120000"/>
+              </a:lnSpc>
+              <a:spcBef>
+                <a:spcPts val="0"/>
+              </a:spcBef>
+            </a:pPr>
+            <a:r>
+              <a:rPr lang="en-US" sz="1400" dirty="0"/>
+              <a:t>	🧮 Hex Addition</a:t>
+            </a:r>
+          </a:p>
+          <a:p>
+            <a:pPr>
+              <a:lnSpc>
+                <a:spcPct val="120000"/>
+              </a:lnSpc>
+              <a:spcBef>
+                <a:spcPts val="0"/>
+              </a:spcBef>
+            </a:pPr>
+            <a:r>
+              <a:rPr lang="en-US" sz="1400" dirty="0"/>
+              <a:t>	Adds 0xBD + 0xA1 (189 + 161), prints: d + e = 0x350 </a:t>
+            </a:r>
+          </a:p>
+          <a:p>
+            <a:pPr>
+              <a:lnSpc>
+                <a:spcPct val="120000"/>
+              </a:lnSpc>
+              <a:spcBef>
+                <a:spcPts val="0"/>
+              </a:spcBef>
+            </a:pPr>
+            <a:r>
+              <a:rPr lang="en-US" sz="1400" dirty="0"/>
+              <a:t>🔐 Print Credentials</a:t>
+            </a:r>
+          </a:p>
+          <a:p>
+            <a:pPr>
+              <a:lnSpc>
+                <a:spcPct val="120000"/>
+              </a:lnSpc>
+              <a:spcBef>
+                <a:spcPts val="0"/>
+              </a:spcBef>
+            </a:pPr>
+            <a:r>
+              <a:rPr lang="en-US" sz="1400" dirty="0"/>
+              <a:t>	</a:t>
+            </a:r>
+            <a:r>
+              <a:rPr lang="en-US" sz="1400" dirty="0" err="1">
+                <a:latin typeface="Courier New" panose="02070309020205020404" pitchFamily="49" charset="0"/>
+                <a:cs typeface="Courier New" panose="02070309020205020404" pitchFamily="49" charset="0"/>
+              </a:rPr>
+              <a:t>Serial.println</a:t>
+            </a:r>
+            <a:r>
+              <a:rPr lang="en-US" sz="1400" dirty="0">
+                <a:latin typeface="Courier New" panose="02070309020205020404" pitchFamily="49" charset="0"/>
+                <a:cs typeface="Courier New" panose="02070309020205020404" pitchFamily="49" charset="0"/>
+              </a:rPr>
+              <a:t>(credentials) –</a:t>
+            </a:r>
+            <a:r>
+              <a:rPr lang="en-US" sz="1400" dirty="0"/>
+              <a:t> prints secret value.</a:t>
+            </a:r>
+          </a:p>
+          <a:p>
+            <a:pPr>
+              <a:lnSpc>
+                <a:spcPct val="120000"/>
+              </a:lnSpc>
+              <a:spcBef>
+                <a:spcPts val="0"/>
+              </a:spcBef>
+            </a:pPr>
+            <a:r>
+              <a:rPr lang="en-US" sz="1400" dirty="0"/>
+              <a:t>⏱️ Delay</a:t>
+            </a:r>
+          </a:p>
+          <a:p>
+            <a:pPr>
+              <a:lnSpc>
+                <a:spcPct val="120000"/>
+              </a:lnSpc>
+              <a:spcBef>
+                <a:spcPts val="0"/>
+              </a:spcBef>
+            </a:pPr>
+            <a:r>
+              <a:rPr lang="en-US" sz="1400" dirty="0"/>
+              <a:t>	Waits 60 seconds before repeating.</a:t>
+            </a:r>
+          </a:p>
+        </p:txBody>
+      </p:sp>
+    </p:spTree>
+    <p:extLst>
+      <p:ext uri="{BB962C8B-B14F-4D97-AF65-F5344CB8AC3E}">
+        <p14:creationId xmlns:p14="http://schemas.microsoft.com/office/powerpoint/2010/main" val="1860216990"/>
+      </p:ext>
+    </p:extLst>
+  </p:cSld>
+  <p:clrMapOvr>
+    <a:masterClrMapping/>
+  </p:clrMapOvr>
+</p:sld>
+</file>
+
+<file path=ppt/slides/slide29.xml><?xml version="1.0" encoding="utf-8"?>
 <p:sld xmlns:a="http://schemas.openxmlformats.org/drawingml/2006/main" xmlns:r="http://schemas.openxmlformats.org/officeDocument/2006/relationships" xmlns:p="http://schemas.openxmlformats.org/presentationml/2006/main">
   <p:cSld>
     <p:spTree>
@@ -19335,7 +21318,187 @@
 </p:sld>
 </file>
 
-<file path=ppt/slides/slide26.xml><?xml version="1.0" encoding="utf-8"?>
+<file path=ppt/slides/slide3.xml><?xml version="1.0" encoding="utf-8"?>
+<p:sld xmlns:a="http://schemas.openxmlformats.org/drawingml/2006/main" xmlns:r="http://schemas.openxmlformats.org/officeDocument/2006/relationships" xmlns:p="http://schemas.openxmlformats.org/presentationml/2006/main">
+  <p:cSld>
+    <p:spTree>
+      <p:nvGrpSpPr>
+        <p:cNvPr id="1" name=""/>
+        <p:cNvGrpSpPr/>
+        <p:nvPr/>
+      </p:nvGrpSpPr>
+      <p:grpSpPr>
+        <a:xfrm>
+          <a:off x="0" y="0"/>
+          <a:ext cx="0" cy="0"/>
+          <a:chOff x="0" y="0"/>
+          <a:chExt cx="0" cy="0"/>
+        </a:xfrm>
+      </p:grpSpPr>
+      <p:sp>
+        <p:nvSpPr>
+          <p:cNvPr id="2" name="Title 1">
+            <a:extLst>
+              <a:ext uri="{FF2B5EF4-FFF2-40B4-BE49-F238E27FC236}">
+                <a16:creationId xmlns:a16="http://schemas.microsoft.com/office/drawing/2014/main" id="{912DF434-28DB-4621-A497-D62C41CE0419}"/>
+              </a:ext>
+            </a:extLst>
+          </p:cNvPr>
+          <p:cNvSpPr>
+            <a:spLocks noGrp="1"/>
+          </p:cNvSpPr>
+          <p:nvPr>
+            <p:ph type="title"/>
+          </p:nvPr>
+        </p:nvSpPr>
+        <p:spPr>
+          <a:xfrm>
+            <a:off x="1158864" y="102021"/>
+            <a:ext cx="9779183" cy="1744415"/>
+          </a:xfrm>
+        </p:spPr>
+        <p:txBody>
+          <a:bodyPr/>
+          <a:lstStyle/>
+          <a:p>
+            <a:r>
+              <a:rPr lang="en-US" dirty="0"/>
+              <a:t>Agenda</a:t>
+            </a:r>
+          </a:p>
+        </p:txBody>
+      </p:sp>
+      <p:sp>
+        <p:nvSpPr>
+          <p:cNvPr id="3" name="Content Placeholder 2">
+            <a:extLst>
+              <a:ext uri="{FF2B5EF4-FFF2-40B4-BE49-F238E27FC236}">
+                <a16:creationId xmlns:a16="http://schemas.microsoft.com/office/drawing/2014/main" id="{22788C46-D0BC-4307-AE55-7601A139E7CB}"/>
+              </a:ext>
+            </a:extLst>
+          </p:cNvPr>
+          <p:cNvSpPr>
+            <a:spLocks noGrp="1"/>
+          </p:cNvSpPr>
+          <p:nvPr>
+            <p:ph idx="1"/>
+          </p:nvPr>
+        </p:nvSpPr>
+        <p:spPr>
+          <a:xfrm>
+            <a:off x="1158865" y="2017467"/>
+            <a:ext cx="9779182" cy="3366815"/>
+          </a:xfrm>
+        </p:spPr>
+        <p:txBody>
+          <a:bodyPr vert="horz" lIns="91440" tIns="45720" rIns="91440" bIns="45720" rtlCol="0" anchor="t">
+            <a:normAutofit lnSpcReduction="10000"/>
+          </a:bodyPr>
+          <a:lstStyle/>
+          <a:p>
+            <a:pPr marL="514350" indent="-514350">
+              <a:buFont typeface="+mj-lt"/>
+              <a:buAutoNum type="arabicPeriod"/>
+            </a:pPr>
+            <a:r>
+              <a:rPr lang="en-US" dirty="0"/>
+              <a:t>Introduction to Reverse Engineering</a:t>
+            </a:r>
+          </a:p>
+          <a:p>
+            <a:pPr marL="514350" indent="-514350">
+              <a:buFont typeface="+mj-lt"/>
+              <a:buAutoNum type="arabicPeriod"/>
+            </a:pPr>
+            <a:r>
+              <a:rPr lang="en-US" dirty="0"/>
+              <a:t>Hardware Reverse Engineering</a:t>
+            </a:r>
+          </a:p>
+          <a:p>
+            <a:pPr marL="971550" lvl="1" indent="-514350">
+              <a:buFont typeface="Arial" panose="020B0604020202020204" pitchFamily="34" charset="0"/>
+              <a:buChar char="•"/>
+            </a:pPr>
+            <a:r>
+              <a:rPr lang="en-US" dirty="0"/>
+              <a:t>Exercise - Continuity Test on Arduino Boards</a:t>
+            </a:r>
+          </a:p>
+          <a:p>
+            <a:pPr marL="971550" lvl="1" indent="-514350">
+              <a:buFont typeface="Arial" panose="020B0604020202020204" pitchFamily="34" charset="0"/>
+              <a:buChar char="•"/>
+            </a:pPr>
+            <a:r>
+              <a:rPr lang="en-US" dirty="0"/>
+              <a:t>Exercise - Chip ID on Arduino Boards</a:t>
+            </a:r>
+          </a:p>
+          <a:p>
+            <a:pPr marL="514350" indent="-514350">
+              <a:buFont typeface="+mj-lt"/>
+              <a:buAutoNum type="arabicPeriod"/>
+            </a:pPr>
+            <a:r>
+              <a:rPr lang="en-US" dirty="0"/>
+              <a:t>Software Reverse Engineering </a:t>
+            </a:r>
+          </a:p>
+          <a:p>
+            <a:pPr marL="971550" lvl="1" indent="-514350">
+              <a:buFont typeface="Arial" panose="020B0604020202020204" pitchFamily="34" charset="0"/>
+              <a:buChar char="•"/>
+            </a:pPr>
+            <a:r>
+              <a:rPr lang="en-US" dirty="0"/>
+              <a:t>Exercise – Flash Firmware to Arduino Uno</a:t>
+            </a:r>
+          </a:p>
+          <a:p>
+            <a:pPr marL="971550" lvl="1" indent="-514350">
+              <a:buFont typeface="Arial" panose="020B0604020202020204" pitchFamily="34" charset="0"/>
+              <a:buChar char="•"/>
+            </a:pPr>
+            <a:r>
+              <a:rPr lang="en-US" dirty="0"/>
+              <a:t>Tutorial – Analyze C Code in </a:t>
+            </a:r>
+            <a:r>
+              <a:rPr lang="en-US" dirty="0" err="1"/>
+              <a:t>Ghidra</a:t>
+            </a:r>
+            <a:r>
+              <a:rPr lang="en-US" dirty="0"/>
+              <a:t> </a:t>
+            </a:r>
+          </a:p>
+          <a:p>
+            <a:pPr marL="514350" indent="-514350">
+              <a:buFont typeface="+mj-lt"/>
+              <a:buAutoNum type="arabicPeriod"/>
+            </a:pPr>
+            <a:r>
+              <a:rPr lang="en-US" dirty="0"/>
+              <a:t>Takeaways &amp; Resources</a:t>
+            </a:r>
+          </a:p>
+        </p:txBody>
+      </p:sp>
+    </p:spTree>
+    <p:extLst>
+      <p:ext uri="{BB962C8B-B14F-4D97-AF65-F5344CB8AC3E}">
+        <p14:creationId xmlns:p14="http://schemas.microsoft.com/office/powerpoint/2010/main" val="1325608595"/>
+      </p:ext>
+    </p:extLst>
+  </p:cSld>
+  <p:clrMapOvr>
+    <a:masterClrMapping/>
+  </p:clrMapOvr>
+</p:sld>
+</file>
+
+<file path=ppt/slides/slide30.xml><?xml version="1.0" encoding="utf-8"?>
 <p:sld xmlns:a="http://schemas.openxmlformats.org/drawingml/2006/main" xmlns:r="http://schemas.openxmlformats.org/officeDocument/2006/relationships" xmlns:p="http://schemas.openxmlformats.org/presentationml/2006/main">
   <p:cSld>
     <p:spTree>
@@ -19465,7 +21628,7 @@
 </p:sld>
 </file>
 
-<file path=ppt/slides/slide27.xml><?xml version="1.0" encoding="utf-8"?>
+<file path=ppt/slides/slide31.xml><?xml version="1.0" encoding="utf-8"?>
 <p:sld xmlns:a="http://schemas.openxmlformats.org/drawingml/2006/main" xmlns:r="http://schemas.openxmlformats.org/officeDocument/2006/relationships" xmlns:p="http://schemas.openxmlformats.org/presentationml/2006/main">
   <p:cSld>
     <p:spTree>
@@ -19633,7 +21796,7 @@
 </p:sld>
 </file>
 
-<file path=ppt/slides/slide28.xml><?xml version="1.0" encoding="utf-8"?>
+<file path=ppt/slides/slide32.xml><?xml version="1.0" encoding="utf-8"?>
 <p:sld xmlns:a="http://schemas.openxmlformats.org/drawingml/2006/main" xmlns:r="http://schemas.openxmlformats.org/officeDocument/2006/relationships" xmlns:p="http://schemas.openxmlformats.org/presentationml/2006/main">
   <p:cSld>
     <p:spTree>
@@ -19734,201 +21897,6 @@
     <p:extLst>
       <p:ext uri="{BB962C8B-B14F-4D97-AF65-F5344CB8AC3E}">
         <p14:creationId xmlns:p14="http://schemas.microsoft.com/office/powerpoint/2010/main" val="1609673525"/>
-      </p:ext>
-    </p:extLst>
-  </p:cSld>
-  <p:clrMapOvr>
-    <a:masterClrMapping/>
-  </p:clrMapOvr>
-</p:sld>
-</file>
-
-<file path=ppt/slides/slide3.xml><?xml version="1.0" encoding="utf-8"?>
-<p:sld xmlns:a="http://schemas.openxmlformats.org/drawingml/2006/main" xmlns:r="http://schemas.openxmlformats.org/officeDocument/2006/relationships" xmlns:p="http://schemas.openxmlformats.org/presentationml/2006/main">
-  <p:cSld>
-    <p:spTree>
-      <p:nvGrpSpPr>
-        <p:cNvPr id="1" name=""/>
-        <p:cNvGrpSpPr/>
-        <p:nvPr/>
-      </p:nvGrpSpPr>
-      <p:grpSpPr>
-        <a:xfrm>
-          <a:off x="0" y="0"/>
-          <a:ext cx="0" cy="0"/>
-          <a:chOff x="0" y="0"/>
-          <a:chExt cx="0" cy="0"/>
-        </a:xfrm>
-      </p:grpSpPr>
-      <p:sp>
-        <p:nvSpPr>
-          <p:cNvPr id="2" name="Title 1">
-            <a:extLst>
-              <a:ext uri="{FF2B5EF4-FFF2-40B4-BE49-F238E27FC236}">
-                <a16:creationId xmlns:a16="http://schemas.microsoft.com/office/drawing/2014/main" id="{912DF434-28DB-4621-A497-D62C41CE0419}"/>
-              </a:ext>
-            </a:extLst>
-          </p:cNvPr>
-          <p:cNvSpPr>
-            <a:spLocks noGrp="1"/>
-          </p:cNvSpPr>
-          <p:nvPr>
-            <p:ph type="title"/>
-          </p:nvPr>
-        </p:nvSpPr>
-        <p:spPr/>
-        <p:txBody>
-          <a:bodyPr/>
-          <a:lstStyle/>
-          <a:p>
-            <a:r>
-              <a:rPr lang="en-US" dirty="0"/>
-              <a:t>Agenda</a:t>
-            </a:r>
-          </a:p>
-        </p:txBody>
-      </p:sp>
-      <p:sp>
-        <p:nvSpPr>
-          <p:cNvPr id="4" name="Content Placeholder 3">
-            <a:extLst>
-              <a:ext uri="{FF2B5EF4-FFF2-40B4-BE49-F238E27FC236}">
-                <a16:creationId xmlns:a16="http://schemas.microsoft.com/office/drawing/2014/main" id="{2C275773-3B7B-AB02-F7C1-77805CE83B9E}"/>
-              </a:ext>
-            </a:extLst>
-          </p:cNvPr>
-          <p:cNvSpPr>
-            <a:spLocks noGrp="1"/>
-          </p:cNvSpPr>
-          <p:nvPr>
-            <p:ph idx="12"/>
-          </p:nvPr>
-        </p:nvSpPr>
-        <p:spPr/>
-        <p:txBody>
-          <a:bodyPr/>
-          <a:lstStyle/>
-          <a:p>
-            <a:endParaRPr lang="en-US"/>
-          </a:p>
-        </p:txBody>
-      </p:sp>
-      <p:sp>
-        <p:nvSpPr>
-          <p:cNvPr id="3" name="Content Placeholder 2">
-            <a:extLst>
-              <a:ext uri="{FF2B5EF4-FFF2-40B4-BE49-F238E27FC236}">
-                <a16:creationId xmlns:a16="http://schemas.microsoft.com/office/drawing/2014/main" id="{22788C46-D0BC-4307-AE55-7601A139E7CB}"/>
-              </a:ext>
-            </a:extLst>
-          </p:cNvPr>
-          <p:cNvSpPr>
-            <a:spLocks noGrp="1"/>
-          </p:cNvSpPr>
-          <p:nvPr>
-            <p:ph idx="11"/>
-          </p:nvPr>
-        </p:nvSpPr>
-        <p:spPr/>
-        <p:txBody>
-          <a:bodyPr vert="horz" lIns="91440" tIns="45720" rIns="91440" bIns="45720" rtlCol="0" anchor="t">
-            <a:normAutofit fontScale="85000" lnSpcReduction="10000"/>
-          </a:bodyPr>
-          <a:lstStyle/>
-          <a:p>
-            <a:pPr marL="514350" indent="-514350">
-              <a:buFont typeface="+mj-lt"/>
-              <a:buAutoNum type="arabicPeriod"/>
-            </a:pPr>
-            <a:r>
-              <a:rPr lang="en-US" dirty="0"/>
-              <a:t>Introduction to Reverse Engineering</a:t>
-            </a:r>
-          </a:p>
-          <a:p>
-            <a:pPr marL="514350" indent="-514350">
-              <a:buFont typeface="+mj-lt"/>
-              <a:buAutoNum type="arabicPeriod"/>
-            </a:pPr>
-            <a:r>
-              <a:rPr lang="en-US" dirty="0"/>
-              <a:t>Hardware Reverse Engineering</a:t>
-            </a:r>
-          </a:p>
-          <a:p>
-            <a:pPr marL="971550" lvl="1" indent="-514350">
-              <a:buFont typeface="Arial" panose="020B0604020202020204" pitchFamily="34" charset="0"/>
-              <a:buChar char="•"/>
-            </a:pPr>
-            <a:r>
-              <a:rPr lang="en-US" dirty="0"/>
-              <a:t>Exercise - Continuity Test on Arduino Boards</a:t>
-            </a:r>
-          </a:p>
-          <a:p>
-            <a:pPr marL="971550" lvl="1" indent="-514350">
-              <a:buFont typeface="Arial" panose="020B0604020202020204" pitchFamily="34" charset="0"/>
-              <a:buChar char="•"/>
-            </a:pPr>
-            <a:r>
-              <a:rPr lang="en-US" dirty="0"/>
-              <a:t>Exercise - Chip ID on Arduino Boards</a:t>
-            </a:r>
-          </a:p>
-          <a:p>
-            <a:pPr marL="514350" indent="-514350">
-              <a:buFont typeface="+mj-lt"/>
-              <a:buAutoNum type="arabicPeriod"/>
-            </a:pPr>
-            <a:r>
-              <a:rPr lang="en-US" dirty="0"/>
-              <a:t>Software Reverse Engineering </a:t>
-            </a:r>
-          </a:p>
-          <a:p>
-            <a:pPr marL="971550" lvl="1" indent="-514350">
-              <a:buFont typeface="Arial" panose="020B0604020202020204" pitchFamily="34" charset="0"/>
-              <a:buChar char="•"/>
-            </a:pPr>
-            <a:r>
-              <a:rPr lang="en-US" dirty="0"/>
-              <a:t>Exercise – Flash Firmware to Arduino Uno</a:t>
-            </a:r>
-          </a:p>
-          <a:p>
-            <a:pPr marL="971550" lvl="1" indent="-514350">
-              <a:buFont typeface="Arial" panose="020B0604020202020204" pitchFamily="34" charset="0"/>
-              <a:buChar char="•"/>
-            </a:pPr>
-            <a:r>
-              <a:rPr lang="en-US" dirty="0"/>
-              <a:t>Tutorial – Analyze C Code in </a:t>
-            </a:r>
-            <a:r>
-              <a:rPr lang="en-US" dirty="0" err="1"/>
-              <a:t>Ghidra</a:t>
-            </a:r>
-            <a:r>
-              <a:rPr lang="en-US" dirty="0"/>
-              <a:t> </a:t>
-            </a:r>
-          </a:p>
-          <a:p>
-            <a:pPr marL="514350" indent="-514350">
-              <a:buFont typeface="+mj-lt"/>
-              <a:buAutoNum type="arabicPeriod"/>
-            </a:pPr>
-            <a:r>
-              <a:rPr lang="en-US" dirty="0"/>
-              <a:t>Takeaways &amp; Resources</a:t>
-            </a:r>
-          </a:p>
-        </p:txBody>
-      </p:sp>
-    </p:spTree>
-    <p:extLst>
-      <p:ext uri="{BB962C8B-B14F-4D97-AF65-F5344CB8AC3E}">
-        <p14:creationId xmlns:p14="http://schemas.microsoft.com/office/powerpoint/2010/main" val="1325608595"/>
       </p:ext>
     </p:extLst>
   </p:cSld>
